--- a/slides/08_Apresentacao_Final_Safe_Student.pptx
+++ b/slides/08_Apresentacao_Final_Safe_Student.pptx
@@ -2547,20 +2547,10 @@
                 <a:ea typeface="Arial" pitchFamily="34" charset="-122"/>
                 <a:cs typeface="Arial" pitchFamily="34" charset="-120"/>
               </a:rPr>
-              <a:t>Atalhos para matrícula e relatórios</a:t>
-            </a:r>
-            <a:endParaRPr lang="en-US" sz="2400" dirty="0"/>
-          </a:p>
-          <a:p>
-            <a:pPr marL="342900" indent="-342900">
-              <a:spcAft>
-                <a:spcPts val="1000"/>
-              </a:spcAft>
-              <a:buSzPct val="100000"/>
-              <a:buChar char="•"/>
-            </a:pPr>
-            <a:r>
-              <a:rPr lang="en-US" sz="2400" dirty="0">
+              <a:t>Atalhos para matrícula e </a:t>
+            </a:r>
+            <a:r>
+              <a:rPr lang="en-US" sz="2400" dirty="0" err="1">
                 <a:solidFill>
                   <a:srgbClr val="14202E"/>
                 </a:solidFill>
@@ -2568,7 +2558,7 @@
                 <a:ea typeface="Arial" pitchFamily="34" charset="-122"/>
                 <a:cs typeface="Arial" pitchFamily="34" charset="-120"/>
               </a:rPr>
-              <a:t>Todos os números são dados fictícios</a:t>
+              <a:t>relatórios</a:t>
             </a:r>
             <a:endParaRPr lang="en-US" sz="2400" dirty="0"/>
           </a:p>
@@ -2678,7 +2668,7 @@
         </p:nvSpPr>
         <p:spPr>
           <a:xfrm>
-            <a:off x="548640" y="713232"/>
+            <a:off x="548640" y="730484"/>
             <a:ext cx="5486400" cy="1463040"/>
           </a:xfrm>
           <a:prstGeom prst="rect">
@@ -2806,20 +2796,10 @@
                 <a:ea typeface="Arial" pitchFamily="34" charset="-122"/>
                 <a:cs typeface="Arial" pitchFamily="34" charset="-120"/>
               </a:rPr>
-              <a:t>Filtros por data, ação e usuário</a:t>
-            </a:r>
-            <a:endParaRPr lang="en-US" sz="2400" dirty="0"/>
-          </a:p>
-          <a:p>
-            <a:pPr marL="342900" indent="-342900">
-              <a:spcAft>
-                <a:spcPts val="1000"/>
-              </a:spcAft>
-              <a:buSzPct val="100000"/>
-              <a:buChar char="•"/>
-            </a:pPr>
-            <a:r>
-              <a:rPr lang="en-US" sz="2400" dirty="0">
+              <a:t>Filtros por data, ação e </a:t>
+            </a:r>
+            <a:r>
+              <a:rPr lang="en-US" sz="2400" dirty="0" err="1">
                 <a:solidFill>
                   <a:srgbClr val="14202E"/>
                 </a:solidFill>
@@ -2827,7 +2807,7 @@
                 <a:ea typeface="Arial" pitchFamily="34" charset="-122"/>
                 <a:cs typeface="Arial" pitchFamily="34" charset="-120"/>
               </a:rPr>
-              <a:t>Gestão não lê mensagens privadas</a:t>
+              <a:t>usuário</a:t>
             </a:r>
             <a:endParaRPr lang="en-US" sz="2400" dirty="0"/>
           </a:p>
@@ -8236,20 +8216,10 @@
                 <a:ea typeface="Arial" pitchFamily="34" charset="-122"/>
                 <a:cs typeface="Arial" pitchFamily="34" charset="-120"/>
               </a:rPr>
-              <a:t>Senhas com scrypt e sessão com expiração</a:t>
-            </a:r>
-            <a:endParaRPr lang="en-US" sz="2400" dirty="0"/>
-          </a:p>
-          <a:p>
-            <a:pPr marL="342900" indent="-342900">
-              <a:spcAft>
-                <a:spcPts val="1000"/>
-              </a:spcAft>
-              <a:buSzPct val="100000"/>
-              <a:buChar char="•"/>
-            </a:pPr>
-            <a:r>
-              <a:rPr lang="en-US" sz="2400" dirty="0">
+              <a:t>Senhas com scrypt e sessão com </a:t>
+            </a:r>
+            <a:r>
+              <a:rPr lang="en-US" sz="2400" dirty="0" err="1">
                 <a:solidFill>
                   <a:srgbClr val="14202E"/>
                 </a:solidFill>
@@ -8257,7 +8227,7 @@
                 <a:ea typeface="Arial" pitchFamily="34" charset="-122"/>
                 <a:cs typeface="Arial" pitchFamily="34" charset="-120"/>
               </a:rPr>
-              <a:t>Contas de demonstração identificadas</a:t>
+              <a:t>expiração</a:t>
             </a:r>
             <a:endParaRPr lang="en-US" sz="2400" dirty="0"/>
           </a:p>

--- a/slides/08_Apresentacao_Final_Safe_Student.pptx
+++ b/slides/08_Apresentacao_Final_Safe_Student.pptx
@@ -153,7 +153,7 @@
     </p:spTree>
     <p:extLst>
       <p:ext uri="{BB962C8B-B14F-4D97-AF65-F5344CB8AC3E}">
-        <p14:creationId xmlns:p14="http://schemas.microsoft.com/office/powerpoint/2010/main" val="756914203"/>
+        <p14:creationId xmlns:p14="http://schemas.microsoft.com/office/powerpoint/2010/main" val="4044497509"/>
       </p:ext>
     </p:extLst>
   </p:cSld>
@@ -2050,7 +2050,7 @@
     <p:bg>
       <p:bgPr>
         <a:solidFill>
-          <a:srgbClr val="FFFFFF"/>
+          <a:srgbClr val="14202E"/>
         </a:solidFill>
         <a:effectLst/>
       </p:bgPr>
@@ -2069,237 +2069,245 @@
           <a:chExt cx="0" cy="0"/>
         </a:xfrm>
       </p:grpSpPr>
-      <p:sp>
-        <p:nvSpPr>
-          <p:cNvPr id="2" name="Text 0"/>
-          <p:cNvSpPr txBox="1"/>
-          <p:nvPr/>
-        </p:nvSpPr>
-        <p:spPr>
-          <a:xfrm>
-            <a:off x="548640" y="320040"/>
-            <a:ext cx="10972800" cy="365760"/>
-          </a:xfrm>
-          <a:prstGeom prst="rect">
-            <a:avLst/>
-          </a:prstGeom>
-          <a:noFill/>
-          <a:ln/>
-        </p:spPr>
-        <p:txBody>
-          <a:bodyPr wrap="square" lIns="0" tIns="0" rIns="0" bIns="0" rtlCol="0" anchor="t"/>
-          <a:lstStyle/>
-          <a:p>
-            <a:pPr marL="0" indent="0">
-              <a:buNone/>
-            </a:pPr>
-            <a:r>
-              <a:rPr lang="en-US" sz="2400" b="1" dirty="0">
-                <a:solidFill>
-                  <a:srgbClr val="C4620A"/>
-                </a:solidFill>
-                <a:latin typeface="Arial" pitchFamily="34" charset="0"/>
-                <a:ea typeface="Arial" pitchFamily="34" charset="-122"/>
-                <a:cs typeface="Arial" pitchFamily="34" charset="-120"/>
-              </a:rPr>
-              <a:t>PRÁTICAS EXTENSIONISTAS INTEGRADORAS VI</a:t>
-            </a:r>
-            <a:endParaRPr lang="en-US" sz="2400" dirty="0"/>
-          </a:p>
-        </p:txBody>
-      </p:sp>
-      <p:sp>
-        <p:nvSpPr>
-          <p:cNvPr id="3" name="Text 1"/>
-          <p:cNvSpPr txBox="1"/>
-          <p:nvPr/>
-        </p:nvSpPr>
-        <p:spPr>
-          <a:xfrm>
-            <a:off x="548640" y="731520"/>
-            <a:ext cx="10972800" cy="914400"/>
-          </a:xfrm>
-          <a:prstGeom prst="rect">
-            <a:avLst/>
-          </a:prstGeom>
-          <a:noFill/>
-          <a:ln/>
-        </p:spPr>
-        <p:txBody>
-          <a:bodyPr wrap="square" lIns="0" tIns="0" rIns="0" bIns="0" rtlCol="0" anchor="t"/>
-          <a:lstStyle/>
-          <a:p>
-            <a:pPr marL="0" indent="0">
-              <a:buNone/>
-            </a:pPr>
-            <a:r>
-              <a:rPr lang="en-US" sz="5400" b="1" dirty="0">
-                <a:solidFill>
-                  <a:srgbClr val="14202E"/>
-                </a:solidFill>
-                <a:latin typeface="Arial" pitchFamily="34" charset="0"/>
-                <a:ea typeface="Arial" pitchFamily="34" charset="-122"/>
-                <a:cs typeface="Arial" pitchFamily="34" charset="-120"/>
-              </a:rPr>
-              <a:t>Safe Student</a:t>
-            </a:r>
-            <a:endParaRPr lang="en-US" sz="5400" dirty="0"/>
-          </a:p>
-        </p:txBody>
-      </p:sp>
-      <p:sp>
-        <p:nvSpPr>
-          <p:cNvPr id="4" name="Text 2"/>
-          <p:cNvSpPr txBox="1"/>
-          <p:nvPr/>
-        </p:nvSpPr>
-        <p:spPr>
-          <a:xfrm>
-            <a:off x="548640" y="1691640"/>
-            <a:ext cx="10972800" cy="457200"/>
-          </a:xfrm>
-          <a:prstGeom prst="rect">
-            <a:avLst/>
-          </a:prstGeom>
-          <a:noFill/>
-          <a:ln/>
-        </p:spPr>
-        <p:txBody>
-          <a:bodyPr wrap="square" lIns="0" tIns="0" rIns="0" bIns="0" rtlCol="0" anchor="t"/>
-          <a:lstStyle/>
-          <a:p>
-            <a:pPr marL="0" indent="0">
-              <a:buNone/>
-            </a:pPr>
-            <a:r>
-              <a:rPr lang="en-US" sz="2800" dirty="0">
-                <a:solidFill>
-                  <a:srgbClr val="1D5FD0"/>
-                </a:solidFill>
-                <a:latin typeface="Arial" pitchFamily="34" charset="0"/>
-                <a:ea typeface="Arial" pitchFamily="34" charset="-122"/>
-                <a:cs typeface="Arial" pitchFamily="34" charset="-120"/>
-              </a:rPr>
-              <a:t>Presença escolar rastreável e comunicação família–escola</a:t>
-            </a:r>
-            <a:endParaRPr lang="en-US" sz="2800" dirty="0"/>
-          </a:p>
-        </p:txBody>
-      </p:sp>
-      <p:sp>
-        <p:nvSpPr>
-          <p:cNvPr id="5" name="Text 3"/>
-          <p:cNvSpPr txBox="1"/>
-          <p:nvPr/>
-        </p:nvSpPr>
-        <p:spPr>
-          <a:xfrm>
-            <a:off x="548640" y="2514600"/>
-            <a:ext cx="6492240" cy="3017520"/>
-          </a:xfrm>
-          <a:prstGeom prst="rect">
-            <a:avLst/>
-          </a:prstGeom>
-          <a:noFill/>
-          <a:ln/>
-        </p:spPr>
-        <p:txBody>
-          <a:bodyPr wrap="square" lIns="0" tIns="0" rIns="0" bIns="0" rtlCol="0" anchor="t"/>
-          <a:lstStyle/>
-          <a:p>
-            <a:pPr marL="0" indent="0">
-              <a:buNone/>
-            </a:pPr>
-            <a:r>
-              <a:rPr lang="en-US" sz="2400" dirty="0">
-                <a:solidFill>
-                  <a:srgbClr val="14202E"/>
-                </a:solidFill>
-                <a:latin typeface="Arial" pitchFamily="34" charset="0"/>
-                <a:ea typeface="Arial" pitchFamily="34" charset="-122"/>
-                <a:cs typeface="Arial" pitchFamily="34" charset="-120"/>
-              </a:rPr>
-              <a:t>Flavio Gabrig Ferreira · 202323361</a:t>
-            </a:r>
-            <a:endParaRPr lang="en-US" sz="2400" dirty="0"/>
-          </a:p>
-          <a:p>
-            <a:pPr marL="0" indent="0">
-              <a:buNone/>
-            </a:pPr>
-            <a:r>
-              <a:rPr lang="en-US" sz="2400" dirty="0">
-                <a:solidFill>
-                  <a:srgbClr val="14202E"/>
-                </a:solidFill>
-                <a:latin typeface="Arial" pitchFamily="34" charset="0"/>
-                <a:ea typeface="Arial" pitchFamily="34" charset="-122"/>
-                <a:cs typeface="Arial" pitchFamily="34" charset="-120"/>
-              </a:rPr>
-              <a:t>Richardson Conceição Ferreira · 202323181</a:t>
-            </a:r>
-            <a:endParaRPr lang="en-US" sz="2400" dirty="0"/>
-          </a:p>
-          <a:p>
-            <a:pPr marL="0" indent="0">
-              <a:buNone/>
-            </a:pPr>
-            <a:r>
-              <a:rPr lang="en-US" sz="2400" dirty="0">
-                <a:solidFill>
-                  <a:srgbClr val="14202E"/>
-                </a:solidFill>
-                <a:latin typeface="Arial" pitchFamily="34" charset="0"/>
-                <a:ea typeface="Arial" pitchFamily="34" charset="-122"/>
-                <a:cs typeface="Arial" pitchFamily="34" charset="-120"/>
-              </a:rPr>
-              <a:t>Lealdo Coelho Válido de Jesus · 202323215</a:t>
-            </a:r>
-            <a:endParaRPr lang="en-US" sz="2400" dirty="0"/>
-          </a:p>
-          <a:p>
-            <a:pPr marL="0" indent="0">
-              <a:buNone/>
-            </a:pPr>
-            <a:r>
-              <a:rPr lang="en-US" sz="2400" dirty="0">
-                <a:solidFill>
-                  <a:srgbClr val="5B6B7C"/>
-                </a:solidFill>
-                <a:latin typeface="Arial" pitchFamily="34" charset="0"/>
-                <a:ea typeface="Arial" pitchFamily="34" charset="-122"/>
-                <a:cs typeface="Arial" pitchFamily="34" charset="-120"/>
-              </a:rPr>
-              <a:t>Prof. Altemar Sales de Oliveira · Saquarema/RJ · 2026</a:t>
-            </a:r>
-            <a:endParaRPr lang="en-US" sz="2400" dirty="0"/>
-          </a:p>
-        </p:txBody>
-      </p:sp>
       <p:pic>
         <p:nvPicPr>
-          <p:cNvPr id="6" name="Image 0" descr="/home/claude/u/ppt/media/image1.jpeg"/>
+          <p:cNvPr id="9" name="Imagem 8">
+            <a:extLst>
+              <a:ext uri="{FF2B5EF4-FFF2-40B4-BE49-F238E27FC236}">
+                <a16:creationId xmlns:a16="http://schemas.microsoft.com/office/drawing/2014/main" id="{8593834A-C8E5-1FBD-CC80-D48CCBCE321D}"/>
+              </a:ext>
+            </a:extLst>
+          </p:cNvPr>
           <p:cNvPicPr>
             <a:picLocks noChangeAspect="1"/>
           </p:cNvPicPr>
           <p:nvPr/>
         </p:nvPicPr>
         <p:blipFill>
-          <a:blip r:embed="rId3"/>
+          <a:blip r:embed="rId3">
+            <a:alphaModFix amt="20000"/>
+          </a:blip>
           <a:stretch>
             <a:fillRect/>
           </a:stretch>
         </p:blipFill>
         <p:spPr>
           <a:xfrm>
-            <a:off x="7315200" y="2560320"/>
-            <a:ext cx="4343400" cy="2139696"/>
+            <a:off x="0" y="0"/>
+            <a:ext cx="12192000" cy="6858000"/>
           </a:xfrm>
           <a:prstGeom prst="rect">
             <a:avLst/>
           </a:prstGeom>
         </p:spPr>
       </p:pic>
+      <p:sp>
+        <p:nvSpPr>
+          <p:cNvPr id="2" name="Text 0"/>
+          <p:cNvSpPr txBox="1"/>
+          <p:nvPr/>
+        </p:nvSpPr>
+        <p:spPr>
+          <a:xfrm>
+            <a:off x="548640" y="320040"/>
+            <a:ext cx="10972800" cy="365760"/>
+          </a:xfrm>
+          <a:prstGeom prst="rect">
+            <a:avLst/>
+          </a:prstGeom>
+          <a:noFill/>
+          <a:ln/>
+        </p:spPr>
+        <p:txBody>
+          <a:bodyPr wrap="square" lIns="0" tIns="0" rIns="0" bIns="0" rtlCol="0" anchor="t"/>
+          <a:lstStyle/>
+          <a:p>
+            <a:pPr marL="0" indent="0">
+              <a:buNone/>
+            </a:pPr>
+            <a:r>
+              <a:rPr lang="en-US" sz="2400" b="1" dirty="0">
+                <a:solidFill>
+                  <a:srgbClr val="6FD3D0"/>
+                </a:solidFill>
+                <a:latin typeface="Arial" pitchFamily="34" charset="0"/>
+                <a:ea typeface="Arial" pitchFamily="34" charset="-122"/>
+                <a:cs typeface="Arial" pitchFamily="34" charset="-120"/>
+              </a:rPr>
+              <a:t>PRÁTICAS EXTENSIONISTAS INTEGRADORAS VI</a:t>
+            </a:r>
+            <a:endParaRPr lang="en-US" sz="2400" dirty="0"/>
+          </a:p>
+        </p:txBody>
+      </p:sp>
+      <p:sp>
+        <p:nvSpPr>
+          <p:cNvPr id="3" name="Text 1"/>
+          <p:cNvSpPr txBox="1"/>
+          <p:nvPr/>
+        </p:nvSpPr>
+        <p:spPr>
+          <a:xfrm>
+            <a:off x="548640" y="731520"/>
+            <a:ext cx="10972800" cy="914400"/>
+          </a:xfrm>
+          <a:prstGeom prst="rect">
+            <a:avLst/>
+          </a:prstGeom>
+          <a:noFill/>
+          <a:ln/>
+        </p:spPr>
+        <p:txBody>
+          <a:bodyPr wrap="square" lIns="0" tIns="0" rIns="0" bIns="0" rtlCol="0" anchor="t"/>
+          <a:lstStyle/>
+          <a:p>
+            <a:pPr marL="0" indent="0">
+              <a:buNone/>
+            </a:pPr>
+            <a:r>
+              <a:rPr lang="en-US" sz="5400" b="1" dirty="0">
+                <a:solidFill>
+                  <a:srgbClr val="FFFFFF"/>
+                </a:solidFill>
+                <a:latin typeface="Arial" pitchFamily="34" charset="0"/>
+                <a:ea typeface="Arial" pitchFamily="34" charset="-122"/>
+                <a:cs typeface="Arial" pitchFamily="34" charset="-120"/>
+              </a:rPr>
+              <a:t>Safe Student</a:t>
+            </a:r>
+            <a:endParaRPr lang="en-US" sz="5400" dirty="0"/>
+          </a:p>
+        </p:txBody>
+      </p:sp>
+      <p:sp>
+        <p:nvSpPr>
+          <p:cNvPr id="4" name="Text 2"/>
+          <p:cNvSpPr txBox="1"/>
+          <p:nvPr/>
+        </p:nvSpPr>
+        <p:spPr>
+          <a:xfrm>
+            <a:off x="548640" y="1691640"/>
+            <a:ext cx="10972800" cy="457200"/>
+          </a:xfrm>
+          <a:prstGeom prst="rect">
+            <a:avLst/>
+          </a:prstGeom>
+          <a:noFill/>
+          <a:ln/>
+        </p:spPr>
+        <p:txBody>
+          <a:bodyPr wrap="square" lIns="0" tIns="0" rIns="0" bIns="0" rtlCol="0" anchor="t"/>
+          <a:lstStyle/>
+          <a:p>
+            <a:pPr marL="0" indent="0">
+              <a:buNone/>
+            </a:pPr>
+            <a:r>
+              <a:rPr lang="en-US" sz="2800" dirty="0">
+                <a:solidFill>
+                  <a:srgbClr val="8FB4F5"/>
+                </a:solidFill>
+                <a:latin typeface="Arial" pitchFamily="34" charset="0"/>
+                <a:ea typeface="Arial" pitchFamily="34" charset="-122"/>
+                <a:cs typeface="Arial" pitchFamily="34" charset="-120"/>
+              </a:rPr>
+              <a:t>Presença escolar rastreável e comunicação família e escola</a:t>
+            </a:r>
+            <a:endParaRPr lang="en-US" sz="2800" dirty="0"/>
+          </a:p>
+        </p:txBody>
+      </p:sp>
+      <p:sp>
+        <p:nvSpPr>
+          <p:cNvPr id="5" name="Text 3"/>
+          <p:cNvSpPr txBox="1"/>
+          <p:nvPr/>
+        </p:nvSpPr>
+        <p:spPr>
+          <a:xfrm>
+            <a:off x="548640" y="2514600"/>
+            <a:ext cx="6492240" cy="3017520"/>
+          </a:xfrm>
+          <a:prstGeom prst="rect">
+            <a:avLst/>
+          </a:prstGeom>
+          <a:noFill/>
+          <a:ln/>
+        </p:spPr>
+        <p:txBody>
+          <a:bodyPr wrap="square" lIns="0" tIns="0" rIns="0" bIns="0" rtlCol="0" anchor="t"/>
+          <a:lstStyle/>
+          <a:p>
+            <a:pPr marL="0" indent="0">
+              <a:buNone/>
+            </a:pPr>
+            <a:r>
+              <a:rPr lang="en-US" sz="2400" dirty="0">
+                <a:solidFill>
+                  <a:srgbClr val="FFFFFF"/>
+                </a:solidFill>
+                <a:latin typeface="Arial" pitchFamily="34" charset="0"/>
+                <a:ea typeface="Arial" pitchFamily="34" charset="-122"/>
+                <a:cs typeface="Arial" pitchFamily="34" charset="-120"/>
+              </a:rPr>
+              <a:t>Flavio Gabrig Ferreira, 202323361</a:t>
+            </a:r>
+            <a:endParaRPr lang="en-US" sz="2400" dirty="0"/>
+          </a:p>
+          <a:p>
+            <a:pPr marL="0" indent="0">
+              <a:buNone/>
+            </a:pPr>
+            <a:r>
+              <a:rPr lang="en-US" sz="2400" dirty="0">
+                <a:solidFill>
+                  <a:srgbClr val="FFFFFF"/>
+                </a:solidFill>
+                <a:latin typeface="Arial" pitchFamily="34" charset="0"/>
+                <a:ea typeface="Arial" pitchFamily="34" charset="-122"/>
+                <a:cs typeface="Arial" pitchFamily="34" charset="-120"/>
+              </a:rPr>
+              <a:t>Richardson Conceição Ferreira, 202323181</a:t>
+            </a:r>
+            <a:endParaRPr lang="en-US" sz="2400" dirty="0"/>
+          </a:p>
+          <a:p>
+            <a:pPr marL="0" indent="0">
+              <a:buNone/>
+            </a:pPr>
+            <a:r>
+              <a:rPr lang="en-US" sz="2400" dirty="0">
+                <a:solidFill>
+                  <a:srgbClr val="FFFFFF"/>
+                </a:solidFill>
+                <a:latin typeface="Arial" pitchFamily="34" charset="0"/>
+                <a:ea typeface="Arial" pitchFamily="34" charset="-122"/>
+                <a:cs typeface="Arial" pitchFamily="34" charset="-120"/>
+              </a:rPr>
+              <a:t>Lealdo Coelho Válido de Jesus, 202323215</a:t>
+            </a:r>
+            <a:endParaRPr lang="en-US" sz="2400" dirty="0"/>
+          </a:p>
+          <a:p>
+            <a:pPr marL="0" indent="0">
+              <a:buNone/>
+            </a:pPr>
+            <a:r>
+              <a:rPr lang="en-US" sz="2400" dirty="0">
+                <a:solidFill>
+                  <a:srgbClr val="A9B6C6"/>
+                </a:solidFill>
+                <a:latin typeface="Arial" pitchFamily="34" charset="0"/>
+                <a:ea typeface="Arial" pitchFamily="34" charset="-122"/>
+                <a:cs typeface="Arial" pitchFamily="34" charset="-120"/>
+              </a:rPr>
+              <a:t>Prof. Altemar Sales de Oliveira, Saquarema/RJ, 2026</a:t>
+            </a:r>
+            <a:endParaRPr lang="en-US" sz="2400" dirty="0"/>
+          </a:p>
+        </p:txBody>
+      </p:sp>
       <p:sp>
         <p:nvSpPr>
           <p:cNvPr id="7" name="Text 4"/>
@@ -2327,13 +2335,13 @@
             <a:r>
               <a:rPr lang="en-US" sz="2400" i="1" dirty="0">
                 <a:solidFill>
-                  <a:srgbClr val="5B6B7C"/>
-                </a:solidFill>
-                <a:latin typeface="Arial" pitchFamily="34" charset="0"/>
-                <a:ea typeface="Arial" pitchFamily="34" charset="-122"/>
-                <a:cs typeface="Arial" pitchFamily="34" charset="-120"/>
-              </a:rPr>
-              <a:t>MVP acadêmico com dados sintéticos — não homologado para produção</a:t>
+                  <a:srgbClr val="A9B6C6"/>
+                </a:solidFill>
+                <a:latin typeface="Arial" pitchFamily="34" charset="0"/>
+                <a:ea typeface="Arial" pitchFamily="34" charset="-122"/>
+                <a:cs typeface="Arial" pitchFamily="34" charset="-120"/>
+              </a:rPr>
+              <a:t>MVP acadêmico com dados sintéticos, não homologado para produção</a:t>
             </a:r>
             <a:endParaRPr lang="en-US" sz="2400" dirty="0"/>
           </a:p>
@@ -2353,7 +2361,7 @@
     <p:bg>
       <p:bgPr>
         <a:solidFill>
-          <a:srgbClr val="FFFFFF"/>
+          <a:srgbClr val="F4F7FB"/>
         </a:solidFill>
         <a:effectLst/>
       </p:bgPr>
@@ -2372,16 +2380,73 @@
           <a:chExt cx="0" cy="0"/>
         </a:xfrm>
       </p:grpSpPr>
-      <p:sp>
-        <p:nvSpPr>
-          <p:cNvPr id="2" name="Text 0"/>
+      <p:pic>
+        <p:nvPicPr>
+          <p:cNvPr id="9" name="Imagem 8">
+            <a:extLst>
+              <a:ext uri="{FF2B5EF4-FFF2-40B4-BE49-F238E27FC236}">
+                <a16:creationId xmlns:a16="http://schemas.microsoft.com/office/drawing/2014/main" id="{73F60F1F-0FEF-93BB-B776-FCC834AE2318}"/>
+              </a:ext>
+            </a:extLst>
+          </p:cNvPr>
+          <p:cNvPicPr>
+            <a:picLocks noChangeAspect="1"/>
+          </p:cNvPicPr>
+          <p:nvPr/>
+        </p:nvPicPr>
+        <p:blipFill>
+          <a:blip r:embed="rId3">
+            <a:alphaModFix amt="5000"/>
+          </a:blip>
+          <a:stretch>
+            <a:fillRect/>
+          </a:stretch>
+        </p:blipFill>
+        <p:spPr>
+          <a:xfrm>
+            <a:off x="0" y="0"/>
+            <a:ext cx="12192000" cy="6858000"/>
+          </a:xfrm>
+          <a:prstGeom prst="rect">
+            <a:avLst/>
+          </a:prstGeom>
+        </p:spPr>
+      </p:pic>
+      <p:sp>
+        <p:nvSpPr>
+          <p:cNvPr id="2" name="Shape 0"/>
+          <p:cNvSpPr/>
+          <p:nvPr/>
+        </p:nvSpPr>
+        <p:spPr>
+          <a:xfrm>
+            <a:off x="0" y="0"/>
+            <a:ext cx="12191695" cy="1444752"/>
+          </a:xfrm>
+          <a:prstGeom prst="rect">
+            <a:avLst/>
+          </a:prstGeom>
+          <a:solidFill>
+            <a:srgbClr val="14202E"/>
+          </a:solidFill>
+          <a:ln w="12700">
+            <a:solidFill>
+              <a:srgbClr val="14202E"/>
+            </a:solidFill>
+            <a:prstDash val="solid"/>
+          </a:ln>
+        </p:spPr>
+      </p:sp>
+      <p:sp>
+        <p:nvSpPr>
+          <p:cNvPr id="3" name="Text 1"/>
           <p:cNvSpPr txBox="1"/>
           <p:nvPr/>
         </p:nvSpPr>
         <p:spPr>
           <a:xfrm>
             <a:off x="548640" y="274320"/>
-            <a:ext cx="5486400" cy="365760"/>
+            <a:ext cx="11064240" cy="365760"/>
           </a:xfrm>
           <a:prstGeom prst="rect">
             <a:avLst/>
@@ -2399,28 +2464,28 @@
             <a:r>
               <a:rPr lang="en-US" sz="2400" b="1" dirty="0">
                 <a:solidFill>
-                  <a:srgbClr val="C4620A"/>
-                </a:solidFill>
-                <a:latin typeface="Arial" pitchFamily="34" charset="0"/>
-                <a:ea typeface="Arial" pitchFamily="34" charset="-122"/>
-                <a:cs typeface="Arial" pitchFamily="34" charset="-120"/>
-              </a:rPr>
-              <a:t>MVP · GESTÃO</a:t>
-            </a:r>
-            <a:endParaRPr lang="en-US" sz="2400" dirty="0"/>
-          </a:p>
-        </p:txBody>
-      </p:sp>
-      <p:sp>
-        <p:nvSpPr>
-          <p:cNvPr id="3" name="Text 1"/>
+                  <a:srgbClr val="6FD3D0"/>
+                </a:solidFill>
+                <a:latin typeface="Arial" pitchFamily="34" charset="0"/>
+                <a:ea typeface="Arial" pitchFamily="34" charset="-122"/>
+                <a:cs typeface="Arial" pitchFamily="34" charset="-120"/>
+              </a:rPr>
+              <a:t>MVP: GESTÃO</a:t>
+            </a:r>
+            <a:endParaRPr lang="en-US" sz="2400" dirty="0"/>
+          </a:p>
+        </p:txBody>
+      </p:sp>
+      <p:sp>
+        <p:nvSpPr>
+          <p:cNvPr id="4" name="Text 2"/>
           <p:cNvSpPr txBox="1"/>
           <p:nvPr/>
         </p:nvSpPr>
         <p:spPr>
           <a:xfrm>
             <a:off x="548640" y="713232"/>
-            <a:ext cx="5486400" cy="1463040"/>
+            <a:ext cx="11064240" cy="640080"/>
           </a:xfrm>
           <a:prstGeom prst="rect">
             <a:avLst/>
@@ -2438,7 +2503,7 @@
             <a:r>
               <a:rPr lang="en-US" sz="3200" b="1" dirty="0">
                 <a:solidFill>
-                  <a:srgbClr val="14202E"/>
+                  <a:srgbClr val="FFFFFF"/>
                 </a:solidFill>
                 <a:latin typeface="Arial" pitchFamily="34" charset="0"/>
                 <a:ea typeface="Arial" pitchFamily="34" charset="-122"/>
@@ -2452,7 +2517,7 @@
       </p:sp>
       <p:sp>
         <p:nvSpPr>
-          <p:cNvPr id="4" name="Text 2"/>
+          <p:cNvPr id="5" name="Text 3"/>
           <p:cNvSpPr txBox="1"/>
           <p:nvPr/>
         </p:nvSpPr>
@@ -2491,14 +2556,14 @@
       </p:sp>
       <p:sp>
         <p:nvSpPr>
-          <p:cNvPr id="6" name="Text 3"/>
-          <p:cNvSpPr txBox="1"/>
-          <p:nvPr/>
-        </p:nvSpPr>
-        <p:spPr>
-          <a:xfrm>
-            <a:off x="548640" y="2468880"/>
-            <a:ext cx="5486400" cy="3566160"/>
+          <p:cNvPr id="7" name="Text 4"/>
+          <p:cNvSpPr txBox="1"/>
+          <p:nvPr/>
+        </p:nvSpPr>
+        <p:spPr>
+          <a:xfrm>
+            <a:off x="548640" y="2377440"/>
+            <a:ext cx="5486400" cy="3657600"/>
           </a:xfrm>
           <a:prstGeom prst="rect">
             <a:avLst/>
@@ -2547,10 +2612,20 @@
                 <a:ea typeface="Arial" pitchFamily="34" charset="-122"/>
                 <a:cs typeface="Arial" pitchFamily="34" charset="-120"/>
               </a:rPr>
-              <a:t>Atalhos para matrícula e </a:t>
-            </a:r>
-            <a:r>
-              <a:rPr lang="en-US" sz="2400" dirty="0" err="1">
+              <a:t>Atalhos para matrícula e relatórios</a:t>
+            </a:r>
+            <a:endParaRPr lang="en-US" sz="2400" dirty="0"/>
+          </a:p>
+          <a:p>
+            <a:pPr marL="342900" indent="-342900">
+              <a:spcAft>
+                <a:spcPts val="1000"/>
+              </a:spcAft>
+              <a:buSzPct val="100000"/>
+              <a:buChar char="•"/>
+            </a:pPr>
+            <a:r>
+              <a:rPr lang="en-US" sz="2400" dirty="0">
                 <a:solidFill>
                   <a:srgbClr val="14202E"/>
                 </a:solidFill>
@@ -2558,7 +2633,7 @@
                 <a:ea typeface="Arial" pitchFamily="34" charset="-122"/>
                 <a:cs typeface="Arial" pitchFamily="34" charset="-120"/>
               </a:rPr>
-              <a:t>relatórios</a:t>
+              <a:t>Todos os números são dados fictícios</a:t>
             </a:r>
             <a:endParaRPr lang="en-US" sz="2400" dirty="0"/>
           </a:p>
@@ -2566,22 +2641,22 @@
       </p:sp>
       <p:pic>
         <p:nvPicPr>
-          <p:cNvPr id="7" name="Image 0" descr="/home/claude/u/ppt/media/image4.jpeg"/>
+          <p:cNvPr id="8" name="Image 0" descr="/home/claude/u/ppt/media/image4.jpeg"/>
           <p:cNvPicPr>
             <a:picLocks noChangeAspect="1"/>
           </p:cNvPicPr>
           <p:nvPr/>
         </p:nvPicPr>
         <p:blipFill>
-          <a:blip r:embed="rId3"/>
+          <a:blip r:embed="rId4"/>
           <a:stretch>
             <a:fillRect/>
           </a:stretch>
         </p:blipFill>
         <p:spPr>
           <a:xfrm>
-            <a:off x="6852046" y="1737360"/>
-            <a:ext cx="4263869" cy="4389120"/>
+            <a:off x="6035040" y="1444752"/>
+            <a:ext cx="6156655" cy="4681728"/>
           </a:xfrm>
           <a:prstGeom prst="rect">
             <a:avLst/>
@@ -2602,7 +2677,7 @@
     <p:bg>
       <p:bgPr>
         <a:solidFill>
-          <a:srgbClr val="FFFFFF"/>
+          <a:srgbClr val="F4F7FB"/>
         </a:solidFill>
         <a:effectLst/>
       </p:bgPr>
@@ -2621,16 +2696,73 @@
           <a:chExt cx="0" cy="0"/>
         </a:xfrm>
       </p:grpSpPr>
-      <p:sp>
-        <p:nvSpPr>
-          <p:cNvPr id="2" name="Text 0"/>
+      <p:pic>
+        <p:nvPicPr>
+          <p:cNvPr id="9" name="Imagem 8">
+            <a:extLst>
+              <a:ext uri="{FF2B5EF4-FFF2-40B4-BE49-F238E27FC236}">
+                <a16:creationId xmlns:a16="http://schemas.microsoft.com/office/drawing/2014/main" id="{23674FF8-6001-DB33-21D0-CF34FC5FC0F3}"/>
+              </a:ext>
+            </a:extLst>
+          </p:cNvPr>
+          <p:cNvPicPr>
+            <a:picLocks noChangeAspect="1"/>
+          </p:cNvPicPr>
+          <p:nvPr/>
+        </p:nvPicPr>
+        <p:blipFill>
+          <a:blip r:embed="rId3">
+            <a:alphaModFix amt="5000"/>
+          </a:blip>
+          <a:stretch>
+            <a:fillRect/>
+          </a:stretch>
+        </p:blipFill>
+        <p:spPr>
+          <a:xfrm>
+            <a:off x="0" y="0"/>
+            <a:ext cx="12192000" cy="6858000"/>
+          </a:xfrm>
+          <a:prstGeom prst="rect">
+            <a:avLst/>
+          </a:prstGeom>
+        </p:spPr>
+      </p:pic>
+      <p:sp>
+        <p:nvSpPr>
+          <p:cNvPr id="2" name="Shape 0"/>
+          <p:cNvSpPr/>
+          <p:nvPr/>
+        </p:nvSpPr>
+        <p:spPr>
+          <a:xfrm>
+            <a:off x="0" y="0"/>
+            <a:ext cx="12191695" cy="1444752"/>
+          </a:xfrm>
+          <a:prstGeom prst="rect">
+            <a:avLst/>
+          </a:prstGeom>
+          <a:solidFill>
+            <a:srgbClr val="14202E"/>
+          </a:solidFill>
+          <a:ln w="12700">
+            <a:solidFill>
+              <a:srgbClr val="14202E"/>
+            </a:solidFill>
+            <a:prstDash val="solid"/>
+          </a:ln>
+        </p:spPr>
+      </p:sp>
+      <p:sp>
+        <p:nvSpPr>
+          <p:cNvPr id="3" name="Text 1"/>
           <p:cNvSpPr txBox="1"/>
           <p:nvPr/>
         </p:nvSpPr>
         <p:spPr>
           <a:xfrm>
             <a:off x="548640" y="274320"/>
-            <a:ext cx="5486400" cy="365760"/>
+            <a:ext cx="11064240" cy="365760"/>
           </a:xfrm>
           <a:prstGeom prst="rect">
             <a:avLst/>
@@ -2648,28 +2780,28 @@
             <a:r>
               <a:rPr lang="en-US" sz="2400" b="1" dirty="0">
                 <a:solidFill>
-                  <a:srgbClr val="C4620A"/>
-                </a:solidFill>
-                <a:latin typeface="Arial" pitchFamily="34" charset="0"/>
-                <a:ea typeface="Arial" pitchFamily="34" charset="-122"/>
-                <a:cs typeface="Arial" pitchFamily="34" charset="-120"/>
-              </a:rPr>
-              <a:t>MVP · GOVERNANÇA</a:t>
-            </a:r>
-            <a:endParaRPr lang="en-US" sz="2400" dirty="0"/>
-          </a:p>
-        </p:txBody>
-      </p:sp>
-      <p:sp>
-        <p:nvSpPr>
-          <p:cNvPr id="3" name="Text 1"/>
-          <p:cNvSpPr txBox="1"/>
-          <p:nvPr/>
-        </p:nvSpPr>
-        <p:spPr>
-          <a:xfrm>
-            <a:off x="548640" y="730484"/>
-            <a:ext cx="5486400" cy="1463040"/>
+                  <a:srgbClr val="6FD3D0"/>
+                </a:solidFill>
+                <a:latin typeface="Arial" pitchFamily="34" charset="0"/>
+                <a:ea typeface="Arial" pitchFamily="34" charset="-122"/>
+                <a:cs typeface="Arial" pitchFamily="34" charset="-120"/>
+              </a:rPr>
+              <a:t>MVP: GOVERNANÇA</a:t>
+            </a:r>
+            <a:endParaRPr lang="en-US" sz="2400" dirty="0"/>
+          </a:p>
+        </p:txBody>
+      </p:sp>
+      <p:sp>
+        <p:nvSpPr>
+          <p:cNvPr id="4" name="Text 2"/>
+          <p:cNvSpPr txBox="1"/>
+          <p:nvPr/>
+        </p:nvSpPr>
+        <p:spPr>
+          <a:xfrm>
+            <a:off x="548640" y="713232"/>
+            <a:ext cx="11064240" cy="640080"/>
           </a:xfrm>
           <a:prstGeom prst="rect">
             <a:avLst/>
@@ -2687,7 +2819,7 @@
             <a:r>
               <a:rPr lang="en-US" sz="3200" b="1" dirty="0">
                 <a:solidFill>
-                  <a:srgbClr val="14202E"/>
+                  <a:srgbClr val="FFFFFF"/>
                 </a:solidFill>
                 <a:latin typeface="Arial" pitchFamily="34" charset="0"/>
                 <a:ea typeface="Arial" pitchFamily="34" charset="-122"/>
@@ -2701,7 +2833,7 @@
       </p:sp>
       <p:sp>
         <p:nvSpPr>
-          <p:cNvPr id="4" name="Text 2"/>
+          <p:cNvPr id="5" name="Text 3"/>
           <p:cNvSpPr txBox="1"/>
           <p:nvPr/>
         </p:nvSpPr>
@@ -2740,14 +2872,14 @@
       </p:sp>
       <p:sp>
         <p:nvSpPr>
-          <p:cNvPr id="6" name="Text 3"/>
-          <p:cNvSpPr txBox="1"/>
-          <p:nvPr/>
-        </p:nvSpPr>
-        <p:spPr>
-          <a:xfrm>
-            <a:off x="548640" y="2468880"/>
-            <a:ext cx="5486400" cy="3566160"/>
+          <p:cNvPr id="7" name="Text 4"/>
+          <p:cNvSpPr txBox="1"/>
+          <p:nvPr/>
+        </p:nvSpPr>
+        <p:spPr>
+          <a:xfrm>
+            <a:off x="548640" y="2377440"/>
+            <a:ext cx="5486400" cy="3657600"/>
           </a:xfrm>
           <a:prstGeom prst="rect">
             <a:avLst/>
@@ -2796,10 +2928,20 @@
                 <a:ea typeface="Arial" pitchFamily="34" charset="-122"/>
                 <a:cs typeface="Arial" pitchFamily="34" charset="-120"/>
               </a:rPr>
-              <a:t>Filtros por data, ação e </a:t>
-            </a:r>
-            <a:r>
-              <a:rPr lang="en-US" sz="2400" dirty="0" err="1">
+              <a:t>Filtros por data, ação e usuário</a:t>
+            </a:r>
+            <a:endParaRPr lang="en-US" sz="2400" dirty="0"/>
+          </a:p>
+          <a:p>
+            <a:pPr marL="342900" indent="-342900">
+              <a:spcAft>
+                <a:spcPts val="1000"/>
+              </a:spcAft>
+              <a:buSzPct val="100000"/>
+              <a:buChar char="•"/>
+            </a:pPr>
+            <a:r>
+              <a:rPr lang="en-US" sz="2400" dirty="0">
                 <a:solidFill>
                   <a:srgbClr val="14202E"/>
                 </a:solidFill>
@@ -2807,7 +2949,7 @@
                 <a:ea typeface="Arial" pitchFamily="34" charset="-122"/>
                 <a:cs typeface="Arial" pitchFamily="34" charset="-120"/>
               </a:rPr>
-              <a:t>usuário</a:t>
+              <a:t>Gestão não lê mensagens privadas</a:t>
             </a:r>
             <a:endParaRPr lang="en-US" sz="2400" dirty="0"/>
           </a:p>
@@ -2815,22 +2957,22 @@
       </p:sp>
       <p:pic>
         <p:nvPicPr>
-          <p:cNvPr id="7" name="Image 0" descr="/home/claude/u/ppt/media/image5.jpeg"/>
+          <p:cNvPr id="8" name="Image 0" descr="/home/claude/u/ppt/media/image5.jpeg"/>
           <p:cNvPicPr>
             <a:picLocks noChangeAspect="1"/>
           </p:cNvPicPr>
           <p:nvPr/>
         </p:nvPicPr>
         <p:blipFill>
-          <a:blip r:embed="rId3"/>
+          <a:blip r:embed="rId4"/>
           <a:stretch>
             <a:fillRect/>
           </a:stretch>
         </p:blipFill>
         <p:spPr>
           <a:xfrm>
-            <a:off x="6309360" y="1922240"/>
-            <a:ext cx="5349240" cy="4019360"/>
+            <a:off x="5710687" y="1444752"/>
+            <a:ext cx="6481313" cy="4496848"/>
           </a:xfrm>
           <a:prstGeom prst="rect">
             <a:avLst/>
@@ -2851,7 +2993,7 @@
     <p:bg>
       <p:bgPr>
         <a:solidFill>
-          <a:srgbClr val="FFFFFF"/>
+          <a:srgbClr val="F4F7FB"/>
         </a:solidFill>
         <a:effectLst/>
       </p:bgPr>
@@ -2870,9 +3012,66 @@
           <a:chExt cx="0" cy="0"/>
         </a:xfrm>
       </p:grpSpPr>
-      <p:sp>
-        <p:nvSpPr>
-          <p:cNvPr id="2" name="Text 0"/>
+      <p:pic>
+        <p:nvPicPr>
+          <p:cNvPr id="16" name="Imagem 15">
+            <a:extLst>
+              <a:ext uri="{FF2B5EF4-FFF2-40B4-BE49-F238E27FC236}">
+                <a16:creationId xmlns:a16="http://schemas.microsoft.com/office/drawing/2014/main" id="{9A236B09-37BE-1996-A696-55A676D21053}"/>
+              </a:ext>
+            </a:extLst>
+          </p:cNvPr>
+          <p:cNvPicPr>
+            <a:picLocks noChangeAspect="1"/>
+          </p:cNvPicPr>
+          <p:nvPr/>
+        </p:nvPicPr>
+        <p:blipFill>
+          <a:blip r:embed="rId3">
+            <a:alphaModFix amt="5000"/>
+          </a:blip>
+          <a:stretch>
+            <a:fillRect/>
+          </a:stretch>
+        </p:blipFill>
+        <p:spPr>
+          <a:xfrm>
+            <a:off x="0" y="0"/>
+            <a:ext cx="12192000" cy="6858000"/>
+          </a:xfrm>
+          <a:prstGeom prst="rect">
+            <a:avLst/>
+          </a:prstGeom>
+        </p:spPr>
+      </p:pic>
+      <p:sp>
+        <p:nvSpPr>
+          <p:cNvPr id="2" name="Shape 0"/>
+          <p:cNvSpPr/>
+          <p:nvPr/>
+        </p:nvSpPr>
+        <p:spPr>
+          <a:xfrm>
+            <a:off x="0" y="0"/>
+            <a:ext cx="12191695" cy="1444752"/>
+          </a:xfrm>
+          <a:prstGeom prst="rect">
+            <a:avLst/>
+          </a:prstGeom>
+          <a:solidFill>
+            <a:srgbClr val="14202E"/>
+          </a:solidFill>
+          <a:ln w="12700">
+            <a:solidFill>
+              <a:srgbClr val="14202E"/>
+            </a:solidFill>
+            <a:prstDash val="solid"/>
+          </a:ln>
+        </p:spPr>
+      </p:sp>
+      <p:sp>
+        <p:nvSpPr>
+          <p:cNvPr id="3" name="Text 1"/>
           <p:cNvSpPr txBox="1"/>
           <p:nvPr/>
         </p:nvSpPr>
@@ -2897,21 +3096,21 @@
             <a:r>
               <a:rPr lang="en-US" sz="2400" b="1" dirty="0">
                 <a:solidFill>
-                  <a:srgbClr val="C4620A"/>
-                </a:solidFill>
-                <a:latin typeface="Arial" pitchFamily="34" charset="0"/>
-                <a:ea typeface="Arial" pitchFamily="34" charset="-122"/>
-                <a:cs typeface="Arial" pitchFamily="34" charset="-120"/>
-              </a:rPr>
-              <a:t>SOLUÇÃO PROPOSTA · ARQUITETURA</a:t>
-            </a:r>
-            <a:endParaRPr lang="en-US" sz="2400" dirty="0"/>
-          </a:p>
-        </p:txBody>
-      </p:sp>
-      <p:sp>
-        <p:nvSpPr>
-          <p:cNvPr id="3" name="Text 1"/>
+                  <a:srgbClr val="6FD3D0"/>
+                </a:solidFill>
+                <a:latin typeface="Arial" pitchFamily="34" charset="0"/>
+                <a:ea typeface="Arial" pitchFamily="34" charset="-122"/>
+                <a:cs typeface="Arial" pitchFamily="34" charset="-120"/>
+              </a:rPr>
+              <a:t>SOLUÇÃO PROPOSTA: ARQUITETURA</a:t>
+            </a:r>
+            <a:endParaRPr lang="en-US" sz="2400" dirty="0"/>
+          </a:p>
+        </p:txBody>
+      </p:sp>
+      <p:sp>
+        <p:nvSpPr>
+          <p:cNvPr id="4" name="Text 2"/>
           <p:cNvSpPr txBox="1"/>
           <p:nvPr/>
         </p:nvSpPr>
@@ -2936,7 +3135,7 @@
             <a:r>
               <a:rPr lang="en-US" sz="3200" b="1" dirty="0">
                 <a:solidFill>
-                  <a:srgbClr val="14202E"/>
+                  <a:srgbClr val="FFFFFF"/>
                 </a:solidFill>
                 <a:latin typeface="Arial" pitchFamily="34" charset="0"/>
                 <a:ea typeface="Arial" pitchFamily="34" charset="-122"/>
@@ -2950,7 +3149,7 @@
       </p:sp>
       <p:sp>
         <p:nvSpPr>
-          <p:cNvPr id="4" name="Text 2"/>
+          <p:cNvPr id="5" name="Text 3"/>
           <p:cNvSpPr txBox="1"/>
           <p:nvPr/>
         </p:nvSpPr>
@@ -2989,7 +3188,7 @@
       </p:sp>
       <p:sp>
         <p:nvSpPr>
-          <p:cNvPr id="6" name="Shape 3"/>
+          <p:cNvPr id="7" name="Shape 4"/>
           <p:cNvSpPr/>
           <p:nvPr/>
         </p:nvSpPr>
@@ -3004,7 +3203,7 @@
             </a:avLst>
           </a:prstGeom>
           <a:solidFill>
-            <a:srgbClr val="F4F7FB"/>
+            <a:srgbClr val="FFFFFF"/>
           </a:solidFill>
           <a:ln w="12700">
             <a:solidFill>
@@ -3016,14 +3215,14 @@
       </p:sp>
       <p:sp>
         <p:nvSpPr>
-          <p:cNvPr id="7" name="Text 4"/>
-          <p:cNvSpPr txBox="1"/>
-          <p:nvPr/>
-        </p:nvSpPr>
-        <p:spPr>
-          <a:xfrm>
-            <a:off x="777240" y="1737360"/>
-            <a:ext cx="4983480" cy="1417320"/>
+          <p:cNvPr id="8" name="Text 5"/>
+          <p:cNvSpPr txBox="1"/>
+          <p:nvPr/>
+        </p:nvSpPr>
+        <p:spPr>
+          <a:xfrm>
+            <a:off x="822960" y="1737360"/>
+            <a:ext cx="4937760" cy="1417320"/>
           </a:xfrm>
           <a:prstGeom prst="rect">
             <a:avLst/>
@@ -3072,7 +3271,7 @@
       </p:sp>
       <p:sp>
         <p:nvSpPr>
-          <p:cNvPr id="8" name="Shape 5"/>
+          <p:cNvPr id="9" name="Shape 6"/>
           <p:cNvSpPr/>
           <p:nvPr/>
         </p:nvSpPr>
@@ -3087,7 +3286,7 @@
             </a:avLst>
           </a:prstGeom>
           <a:solidFill>
-            <a:srgbClr val="F4F7FB"/>
+            <a:srgbClr val="FFFFFF"/>
           </a:solidFill>
           <a:ln w="12700">
             <a:solidFill>
@@ -3099,14 +3298,14 @@
       </p:sp>
       <p:sp>
         <p:nvSpPr>
-          <p:cNvPr id="9" name="Text 6"/>
-          <p:cNvSpPr txBox="1"/>
-          <p:nvPr/>
-        </p:nvSpPr>
-        <p:spPr>
-          <a:xfrm>
-            <a:off x="6400800" y="1737360"/>
-            <a:ext cx="4983480" cy="1417320"/>
+          <p:cNvPr id="10" name="Text 7"/>
+          <p:cNvSpPr txBox="1"/>
+          <p:nvPr/>
+        </p:nvSpPr>
+        <p:spPr>
+          <a:xfrm>
+            <a:off x="6446520" y="1737360"/>
+            <a:ext cx="4937760" cy="1417320"/>
           </a:xfrm>
           <a:prstGeom prst="rect">
             <a:avLst/>
@@ -3155,7 +3354,7 @@
       </p:sp>
       <p:sp>
         <p:nvSpPr>
-          <p:cNvPr id="10" name="Shape 7"/>
+          <p:cNvPr id="11" name="Shape 8"/>
           <p:cNvSpPr/>
           <p:nvPr/>
         </p:nvSpPr>
@@ -3170,7 +3369,7 @@
             </a:avLst>
           </a:prstGeom>
           <a:solidFill>
-            <a:srgbClr val="F4F7FB"/>
+            <a:srgbClr val="FFFFFF"/>
           </a:solidFill>
           <a:ln w="12700">
             <a:solidFill>
@@ -3182,14 +3381,14 @@
       </p:sp>
       <p:sp>
         <p:nvSpPr>
-          <p:cNvPr id="11" name="Text 8"/>
-          <p:cNvSpPr txBox="1"/>
-          <p:nvPr/>
-        </p:nvSpPr>
-        <p:spPr>
-          <a:xfrm>
-            <a:off x="777240" y="3703320"/>
-            <a:ext cx="4983480" cy="1417320"/>
+          <p:cNvPr id="12" name="Text 9"/>
+          <p:cNvSpPr txBox="1"/>
+          <p:nvPr/>
+        </p:nvSpPr>
+        <p:spPr>
+          <a:xfrm>
+            <a:off x="822960" y="3703320"/>
+            <a:ext cx="4937760" cy="1417320"/>
           </a:xfrm>
           <a:prstGeom prst="rect">
             <a:avLst/>
@@ -3238,7 +3437,7 @@
       </p:sp>
       <p:sp>
         <p:nvSpPr>
-          <p:cNvPr id="12" name="Shape 9"/>
+          <p:cNvPr id="13" name="Shape 10"/>
           <p:cNvSpPr/>
           <p:nvPr/>
         </p:nvSpPr>
@@ -3253,7 +3452,7 @@
             </a:avLst>
           </a:prstGeom>
           <a:solidFill>
-            <a:srgbClr val="F4F7FB"/>
+            <a:srgbClr val="FFFFFF"/>
           </a:solidFill>
           <a:ln w="12700">
             <a:solidFill>
@@ -3265,14 +3464,14 @@
       </p:sp>
       <p:sp>
         <p:nvSpPr>
-          <p:cNvPr id="13" name="Text 10"/>
-          <p:cNvSpPr txBox="1"/>
-          <p:nvPr/>
-        </p:nvSpPr>
-        <p:spPr>
-          <a:xfrm>
-            <a:off x="6400800" y="3703320"/>
-            <a:ext cx="4983480" cy="1417320"/>
+          <p:cNvPr id="14" name="Text 11"/>
+          <p:cNvSpPr txBox="1"/>
+          <p:nvPr/>
+        </p:nvSpPr>
+        <p:spPr>
+          <a:xfrm>
+            <a:off x="6446520" y="3703320"/>
+            <a:ext cx="4937760" cy="1417320"/>
           </a:xfrm>
           <a:prstGeom prst="rect">
             <a:avLst/>
@@ -3321,7 +3520,7 @@
       </p:sp>
       <p:sp>
         <p:nvSpPr>
-          <p:cNvPr id="14" name="Text 11"/>
+          <p:cNvPr id="15" name="Text 12"/>
           <p:cNvSpPr txBox="1"/>
           <p:nvPr/>
         </p:nvSpPr>
@@ -3346,7 +3545,7 @@
             <a:r>
               <a:rPr lang="en-US" sz="2400" b="1" dirty="0">
                 <a:solidFill>
-                  <a:srgbClr val="C4620A"/>
+                  <a:srgbClr val="0B6E70"/>
                 </a:solidFill>
                 <a:latin typeface="Arial" pitchFamily="34" charset="0"/>
                 <a:ea typeface="Arial" pitchFamily="34" charset="-122"/>
@@ -3372,7 +3571,7 @@
     <p:bg>
       <p:bgPr>
         <a:solidFill>
-          <a:srgbClr val="FFFFFF"/>
+          <a:srgbClr val="F4F7FB"/>
         </a:solidFill>
         <a:effectLst/>
       </p:bgPr>
@@ -3391,9 +3590,66 @@
           <a:chExt cx="0" cy="0"/>
         </a:xfrm>
       </p:grpSpPr>
-      <p:sp>
-        <p:nvSpPr>
-          <p:cNvPr id="2" name="Text 0"/>
+      <p:pic>
+        <p:nvPicPr>
+          <p:cNvPr id="14" name="Imagem 13">
+            <a:extLst>
+              <a:ext uri="{FF2B5EF4-FFF2-40B4-BE49-F238E27FC236}">
+                <a16:creationId xmlns:a16="http://schemas.microsoft.com/office/drawing/2014/main" id="{7C444903-9644-8A75-2F9A-3D803EA339B0}"/>
+              </a:ext>
+            </a:extLst>
+          </p:cNvPr>
+          <p:cNvPicPr>
+            <a:picLocks noChangeAspect="1"/>
+          </p:cNvPicPr>
+          <p:nvPr/>
+        </p:nvPicPr>
+        <p:blipFill>
+          <a:blip r:embed="rId3">
+            <a:alphaModFix amt="20000"/>
+          </a:blip>
+          <a:stretch>
+            <a:fillRect/>
+          </a:stretch>
+        </p:blipFill>
+        <p:spPr>
+          <a:xfrm>
+            <a:off x="0" y="0"/>
+            <a:ext cx="12192000" cy="6858000"/>
+          </a:xfrm>
+          <a:prstGeom prst="rect">
+            <a:avLst/>
+          </a:prstGeom>
+        </p:spPr>
+      </p:pic>
+      <p:sp>
+        <p:nvSpPr>
+          <p:cNvPr id="2" name="Shape 0"/>
+          <p:cNvSpPr/>
+          <p:nvPr/>
+        </p:nvSpPr>
+        <p:spPr>
+          <a:xfrm>
+            <a:off x="0" y="0"/>
+            <a:ext cx="12191695" cy="1444752"/>
+          </a:xfrm>
+          <a:prstGeom prst="rect">
+            <a:avLst/>
+          </a:prstGeom>
+          <a:solidFill>
+            <a:srgbClr val="14202E"/>
+          </a:solidFill>
+          <a:ln w="12700">
+            <a:solidFill>
+              <a:srgbClr val="14202E"/>
+            </a:solidFill>
+            <a:prstDash val="solid"/>
+          </a:ln>
+        </p:spPr>
+      </p:sp>
+      <p:sp>
+        <p:nvSpPr>
+          <p:cNvPr id="3" name="Text 1"/>
           <p:cNvSpPr txBox="1"/>
           <p:nvPr/>
         </p:nvSpPr>
@@ -3418,21 +3674,21 @@
             <a:r>
               <a:rPr lang="en-US" sz="2400" b="1" dirty="0">
                 <a:solidFill>
-                  <a:srgbClr val="C4620A"/>
-                </a:solidFill>
-                <a:latin typeface="Arial" pitchFamily="34" charset="0"/>
-                <a:ea typeface="Arial" pitchFamily="34" charset="-122"/>
-                <a:cs typeface="Arial" pitchFamily="34" charset="-120"/>
-              </a:rPr>
-              <a:t>SOLUÇÃO PROPOSTA · PERFIS</a:t>
-            </a:r>
-            <a:endParaRPr lang="en-US" sz="2400" dirty="0"/>
-          </a:p>
-        </p:txBody>
-      </p:sp>
-      <p:sp>
-        <p:nvSpPr>
-          <p:cNvPr id="3" name="Text 1"/>
+                  <a:srgbClr val="6FD3D0"/>
+                </a:solidFill>
+                <a:latin typeface="Arial" pitchFamily="34" charset="0"/>
+                <a:ea typeface="Arial" pitchFamily="34" charset="-122"/>
+                <a:cs typeface="Arial" pitchFamily="34" charset="-120"/>
+              </a:rPr>
+              <a:t>SOLUÇÃO PROPOSTA: PERFIS</a:t>
+            </a:r>
+            <a:endParaRPr lang="en-US" sz="2400" dirty="0"/>
+          </a:p>
+        </p:txBody>
+      </p:sp>
+      <p:sp>
+        <p:nvSpPr>
+          <p:cNvPr id="4" name="Text 2"/>
           <p:cNvSpPr txBox="1"/>
           <p:nvPr/>
         </p:nvSpPr>
@@ -3457,7 +3713,7 @@
             <a:r>
               <a:rPr lang="en-US" sz="3200" b="1" dirty="0">
                 <a:solidFill>
-                  <a:srgbClr val="14202E"/>
+                  <a:srgbClr val="FFFFFF"/>
                 </a:solidFill>
                 <a:latin typeface="Arial" pitchFamily="34" charset="0"/>
                 <a:ea typeface="Arial" pitchFamily="34" charset="-122"/>
@@ -3471,7 +3727,7 @@
       </p:sp>
       <p:sp>
         <p:nvSpPr>
-          <p:cNvPr id="4" name="Text 2"/>
+          <p:cNvPr id="5" name="Text 3"/>
           <p:cNvSpPr txBox="1"/>
           <p:nvPr/>
         </p:nvSpPr>
@@ -3510,7 +3766,7 @@
       </p:sp>
       <p:sp>
         <p:nvSpPr>
-          <p:cNvPr id="6" name="Shape 3"/>
+          <p:cNvPr id="7" name="Shape 4"/>
           <p:cNvSpPr/>
           <p:nvPr/>
         </p:nvSpPr>
@@ -3525,7 +3781,7 @@
             </a:avLst>
           </a:prstGeom>
           <a:solidFill>
-            <a:srgbClr val="F4F7FB"/>
+            <a:srgbClr val="FFFFFF"/>
           </a:solidFill>
           <a:ln w="12700">
             <a:solidFill>
@@ -3537,14 +3793,14 @@
       </p:sp>
       <p:sp>
         <p:nvSpPr>
-          <p:cNvPr id="7" name="Text 4"/>
-          <p:cNvSpPr txBox="1"/>
-          <p:nvPr/>
-        </p:nvSpPr>
-        <p:spPr>
-          <a:xfrm>
-            <a:off x="777240" y="1737360"/>
-            <a:ext cx="3108960" cy="3200400"/>
+          <p:cNvPr id="8" name="Text 5"/>
+          <p:cNvSpPr txBox="1"/>
+          <p:nvPr/>
+        </p:nvSpPr>
+        <p:spPr>
+          <a:xfrm>
+            <a:off x="822960" y="1737360"/>
+            <a:ext cx="3063240" cy="3200400"/>
           </a:xfrm>
           <a:prstGeom prst="rect">
             <a:avLst/>
@@ -3610,7 +3866,7 @@
       </p:sp>
       <p:sp>
         <p:nvSpPr>
-          <p:cNvPr id="8" name="Shape 5"/>
+          <p:cNvPr id="9" name="Shape 6"/>
           <p:cNvSpPr/>
           <p:nvPr/>
         </p:nvSpPr>
@@ -3625,7 +3881,7 @@
             </a:avLst>
           </a:prstGeom>
           <a:solidFill>
-            <a:srgbClr val="F4F7FB"/>
+            <a:srgbClr val="FFFFFF"/>
           </a:solidFill>
           <a:ln w="12700">
             <a:solidFill>
@@ -3637,14 +3893,14 @@
       </p:sp>
       <p:sp>
         <p:nvSpPr>
-          <p:cNvPr id="9" name="Text 6"/>
-          <p:cNvSpPr txBox="1"/>
-          <p:nvPr/>
-        </p:nvSpPr>
-        <p:spPr>
-          <a:xfrm>
-            <a:off x="4526280" y="1737360"/>
-            <a:ext cx="3108960" cy="3200400"/>
+          <p:cNvPr id="10" name="Text 7"/>
+          <p:cNvSpPr txBox="1"/>
+          <p:nvPr/>
+        </p:nvSpPr>
+        <p:spPr>
+          <a:xfrm>
+            <a:off x="4572000" y="1737360"/>
+            <a:ext cx="3063240" cy="3200400"/>
           </a:xfrm>
           <a:prstGeom prst="rect">
             <a:avLst/>
@@ -3710,7 +3966,7 @@
       </p:sp>
       <p:sp>
         <p:nvSpPr>
-          <p:cNvPr id="10" name="Shape 7"/>
+          <p:cNvPr id="11" name="Shape 8"/>
           <p:cNvSpPr/>
           <p:nvPr/>
         </p:nvSpPr>
@@ -3725,7 +3981,7 @@
             </a:avLst>
           </a:prstGeom>
           <a:solidFill>
-            <a:srgbClr val="F4F7FB"/>
+            <a:srgbClr val="FFFFFF"/>
           </a:solidFill>
           <a:ln w="12700">
             <a:solidFill>
@@ -3737,14 +3993,14 @@
       </p:sp>
       <p:sp>
         <p:nvSpPr>
-          <p:cNvPr id="11" name="Text 8"/>
-          <p:cNvSpPr txBox="1"/>
-          <p:nvPr/>
-        </p:nvSpPr>
-        <p:spPr>
-          <a:xfrm>
-            <a:off x="8275320" y="1737360"/>
-            <a:ext cx="3108960" cy="3200400"/>
+          <p:cNvPr id="12" name="Text 9"/>
+          <p:cNvSpPr txBox="1"/>
+          <p:nvPr/>
+        </p:nvSpPr>
+        <p:spPr>
+          <a:xfrm>
+            <a:off x="8321040" y="1737360"/>
+            <a:ext cx="3063240" cy="3200400"/>
           </a:xfrm>
           <a:prstGeom prst="rect">
             <a:avLst/>
@@ -3810,7 +4066,7 @@
       </p:sp>
       <p:sp>
         <p:nvSpPr>
-          <p:cNvPr id="12" name="Text 9"/>
+          <p:cNvPr id="13" name="Text 10"/>
           <p:cNvSpPr txBox="1"/>
           <p:nvPr/>
         </p:nvSpPr>
@@ -3835,13 +4091,13 @@
             <a:r>
               <a:rPr lang="en-US" sz="2400" b="1" dirty="0">
                 <a:solidFill>
-                  <a:srgbClr val="C4620A"/>
-                </a:solidFill>
-                <a:latin typeface="Arial" pitchFamily="34" charset="0"/>
-                <a:ea typeface="Arial" pitchFamily="34" charset="-122"/>
-                <a:cs typeface="Arial" pitchFamily="34" charset="-120"/>
-              </a:rPr>
-              <a:t>Autorização no backend: esconder um botão não é controle de acesso.</a:t>
+                  <a:srgbClr val="0B6E70"/>
+                </a:solidFill>
+                <a:latin typeface="Arial" pitchFamily="34" charset="0"/>
+                <a:ea typeface="Arial" pitchFamily="34" charset="-122"/>
+                <a:cs typeface="Arial" pitchFamily="34" charset="-120"/>
+              </a:rPr>
+              <a:t>A autorização é aplicada no backend, não apenas na interface.</a:t>
             </a:r>
             <a:endParaRPr lang="en-US" sz="2400" dirty="0"/>
           </a:p>
@@ -3861,7 +4117,7 @@
     <p:bg>
       <p:bgPr>
         <a:solidFill>
-          <a:srgbClr val="FFFFFF"/>
+          <a:srgbClr val="F4F7FB"/>
         </a:solidFill>
         <a:effectLst/>
       </p:bgPr>
@@ -3880,9 +4136,66 @@
           <a:chExt cx="0" cy="0"/>
         </a:xfrm>
       </p:grpSpPr>
-      <p:sp>
-        <p:nvSpPr>
-          <p:cNvPr id="2" name="Text 0"/>
+      <p:pic>
+        <p:nvPicPr>
+          <p:cNvPr id="20" name="Imagem 19">
+            <a:extLst>
+              <a:ext uri="{FF2B5EF4-FFF2-40B4-BE49-F238E27FC236}">
+                <a16:creationId xmlns:a16="http://schemas.microsoft.com/office/drawing/2014/main" id="{A253861B-D539-06DF-E57C-2DB915062C66}"/>
+              </a:ext>
+            </a:extLst>
+          </p:cNvPr>
+          <p:cNvPicPr>
+            <a:picLocks noChangeAspect="1"/>
+          </p:cNvPicPr>
+          <p:nvPr/>
+        </p:nvPicPr>
+        <p:blipFill>
+          <a:blip r:embed="rId3">
+            <a:alphaModFix amt="20000"/>
+          </a:blip>
+          <a:stretch>
+            <a:fillRect/>
+          </a:stretch>
+        </p:blipFill>
+        <p:spPr>
+          <a:xfrm>
+            <a:off x="0" y="0"/>
+            <a:ext cx="12192000" cy="6858000"/>
+          </a:xfrm>
+          <a:prstGeom prst="rect">
+            <a:avLst/>
+          </a:prstGeom>
+        </p:spPr>
+      </p:pic>
+      <p:sp>
+        <p:nvSpPr>
+          <p:cNvPr id="2" name="Shape 0"/>
+          <p:cNvSpPr/>
+          <p:nvPr/>
+        </p:nvSpPr>
+        <p:spPr>
+          <a:xfrm>
+            <a:off x="0" y="0"/>
+            <a:ext cx="12191695" cy="1444752"/>
+          </a:xfrm>
+          <a:prstGeom prst="rect">
+            <a:avLst/>
+          </a:prstGeom>
+          <a:solidFill>
+            <a:srgbClr val="14202E"/>
+          </a:solidFill>
+          <a:ln w="12700">
+            <a:solidFill>
+              <a:srgbClr val="14202E"/>
+            </a:solidFill>
+            <a:prstDash val="solid"/>
+          </a:ln>
+        </p:spPr>
+      </p:sp>
+      <p:sp>
+        <p:nvSpPr>
+          <p:cNvPr id="3" name="Text 1"/>
           <p:cNvSpPr txBox="1"/>
           <p:nvPr/>
         </p:nvSpPr>
@@ -3907,7 +4220,7 @@
             <a:r>
               <a:rPr lang="en-US" sz="2400" b="1" dirty="0">
                 <a:solidFill>
-                  <a:srgbClr val="C4620A"/>
+                  <a:srgbClr val="6FD3D0"/>
                 </a:solidFill>
                 <a:latin typeface="Arial" pitchFamily="34" charset="0"/>
                 <a:ea typeface="Arial" pitchFamily="34" charset="-122"/>
@@ -3921,7 +4234,7 @@
       </p:sp>
       <p:sp>
         <p:nvSpPr>
-          <p:cNvPr id="3" name="Text 1"/>
+          <p:cNvPr id="4" name="Text 2"/>
           <p:cNvSpPr txBox="1"/>
           <p:nvPr/>
         </p:nvSpPr>
@@ -3946,7 +4259,7 @@
             <a:r>
               <a:rPr lang="en-US" sz="3200" b="1" dirty="0">
                 <a:solidFill>
-                  <a:srgbClr val="14202E"/>
+                  <a:srgbClr val="FFFFFF"/>
                 </a:solidFill>
                 <a:latin typeface="Arial" pitchFamily="34" charset="0"/>
                 <a:ea typeface="Arial" pitchFamily="34" charset="-122"/>
@@ -3960,7 +4273,7 @@
       </p:sp>
       <p:sp>
         <p:nvSpPr>
-          <p:cNvPr id="4" name="Text 2"/>
+          <p:cNvPr id="5" name="Text 3"/>
           <p:cNvSpPr txBox="1"/>
           <p:nvPr/>
         </p:nvSpPr>
@@ -3999,7 +4312,7 @@
       </p:sp>
       <p:sp>
         <p:nvSpPr>
-          <p:cNvPr id="6" name="Shape 3"/>
+          <p:cNvPr id="7" name="Shape 4"/>
           <p:cNvSpPr/>
           <p:nvPr/>
         </p:nvSpPr>
@@ -4014,7 +4327,7 @@
             </a:avLst>
           </a:prstGeom>
           <a:solidFill>
-            <a:srgbClr val="F4F7FB"/>
+            <a:srgbClr val="FFFFFF"/>
           </a:solidFill>
           <a:ln w="12700">
             <a:solidFill>
@@ -4026,13 +4339,13 @@
       </p:sp>
       <p:sp>
         <p:nvSpPr>
-          <p:cNvPr id="7" name="Text 4"/>
-          <p:cNvSpPr txBox="1"/>
-          <p:nvPr/>
-        </p:nvSpPr>
-        <p:spPr>
-          <a:xfrm>
-            <a:off x="731520" y="1783080"/>
+          <p:cNvPr id="8" name="Text 5"/>
+          <p:cNvSpPr txBox="1"/>
+          <p:nvPr/>
+        </p:nvSpPr>
+        <p:spPr>
+          <a:xfrm>
+            <a:off x="777240" y="1783080"/>
             <a:ext cx="2286000" cy="822960"/>
           </a:xfrm>
           <a:prstGeom prst="rect">
@@ -4065,14 +4378,14 @@
       </p:sp>
       <p:sp>
         <p:nvSpPr>
-          <p:cNvPr id="8" name="Text 5"/>
-          <p:cNvSpPr txBox="1"/>
-          <p:nvPr/>
-        </p:nvSpPr>
-        <p:spPr>
-          <a:xfrm>
-            <a:off x="731520" y="2697480"/>
-            <a:ext cx="2286000" cy="1463040"/>
+          <p:cNvPr id="9" name="Text 6"/>
+          <p:cNvSpPr txBox="1"/>
+          <p:nvPr/>
+        </p:nvSpPr>
+        <p:spPr>
+          <a:xfrm>
+            <a:off x="777240" y="2697480"/>
+            <a:ext cx="2240280" cy="1463040"/>
           </a:xfrm>
           <a:prstGeom prst="rect">
             <a:avLst/>
@@ -4104,7 +4417,7 @@
       </p:sp>
       <p:sp>
         <p:nvSpPr>
-          <p:cNvPr id="9" name="Shape 6"/>
+          <p:cNvPr id="10" name="Shape 7"/>
           <p:cNvSpPr/>
           <p:nvPr/>
         </p:nvSpPr>
@@ -4119,7 +4432,7 @@
             </a:avLst>
           </a:prstGeom>
           <a:solidFill>
-            <a:srgbClr val="F4F7FB"/>
+            <a:srgbClr val="FFFFFF"/>
           </a:solidFill>
           <a:ln w="12700">
             <a:solidFill>
@@ -4131,13 +4444,13 @@
       </p:sp>
       <p:sp>
         <p:nvSpPr>
-          <p:cNvPr id="10" name="Text 7"/>
-          <p:cNvSpPr txBox="1"/>
-          <p:nvPr/>
-        </p:nvSpPr>
-        <p:spPr>
-          <a:xfrm>
-            <a:off x="3520440" y="1783080"/>
+          <p:cNvPr id="11" name="Text 8"/>
+          <p:cNvSpPr txBox="1"/>
+          <p:nvPr/>
+        </p:nvSpPr>
+        <p:spPr>
+          <a:xfrm>
+            <a:off x="3566160" y="1783080"/>
             <a:ext cx="2286000" cy="822960"/>
           </a:xfrm>
           <a:prstGeom prst="rect">
@@ -4170,14 +4483,14 @@
       </p:sp>
       <p:sp>
         <p:nvSpPr>
-          <p:cNvPr id="11" name="Text 8"/>
-          <p:cNvSpPr txBox="1"/>
-          <p:nvPr/>
-        </p:nvSpPr>
-        <p:spPr>
-          <a:xfrm>
-            <a:off x="3520440" y="2697480"/>
-            <a:ext cx="2286000" cy="1463040"/>
+          <p:cNvPr id="12" name="Text 9"/>
+          <p:cNvSpPr txBox="1"/>
+          <p:nvPr/>
+        </p:nvSpPr>
+        <p:spPr>
+          <a:xfrm>
+            <a:off x="3566160" y="2697480"/>
+            <a:ext cx="2240280" cy="1463040"/>
           </a:xfrm>
           <a:prstGeom prst="rect">
             <a:avLst/>
@@ -4209,7 +4522,7 @@
       </p:sp>
       <p:sp>
         <p:nvSpPr>
-          <p:cNvPr id="12" name="Shape 9"/>
+          <p:cNvPr id="13" name="Shape 10"/>
           <p:cNvSpPr/>
           <p:nvPr/>
         </p:nvSpPr>
@@ -4224,7 +4537,7 @@
             </a:avLst>
           </a:prstGeom>
           <a:solidFill>
-            <a:srgbClr val="F4F7FB"/>
+            <a:srgbClr val="FFFFFF"/>
           </a:solidFill>
           <a:ln w="12700">
             <a:solidFill>
@@ -4236,13 +4549,13 @@
       </p:sp>
       <p:sp>
         <p:nvSpPr>
-          <p:cNvPr id="13" name="Text 10"/>
-          <p:cNvSpPr txBox="1"/>
-          <p:nvPr/>
-        </p:nvSpPr>
-        <p:spPr>
-          <a:xfrm>
-            <a:off x="6309360" y="1783080"/>
+          <p:cNvPr id="14" name="Text 11"/>
+          <p:cNvSpPr txBox="1"/>
+          <p:nvPr/>
+        </p:nvSpPr>
+        <p:spPr>
+          <a:xfrm>
+            <a:off x="6355080" y="1783080"/>
             <a:ext cx="2286000" cy="822960"/>
           </a:xfrm>
           <a:prstGeom prst="rect">
@@ -4275,14 +4588,14 @@
       </p:sp>
       <p:sp>
         <p:nvSpPr>
-          <p:cNvPr id="14" name="Text 11"/>
-          <p:cNvSpPr txBox="1"/>
-          <p:nvPr/>
-        </p:nvSpPr>
-        <p:spPr>
-          <a:xfrm>
-            <a:off x="6309360" y="2697480"/>
-            <a:ext cx="2286000" cy="1463040"/>
+          <p:cNvPr id="15" name="Text 12"/>
+          <p:cNvSpPr txBox="1"/>
+          <p:nvPr/>
+        </p:nvSpPr>
+        <p:spPr>
+          <a:xfrm>
+            <a:off x="6355080" y="2697480"/>
+            <a:ext cx="2240280" cy="1463040"/>
           </a:xfrm>
           <a:prstGeom prst="rect">
             <a:avLst/>
@@ -4314,7 +4627,7 @@
       </p:sp>
       <p:sp>
         <p:nvSpPr>
-          <p:cNvPr id="15" name="Shape 12"/>
+          <p:cNvPr id="16" name="Shape 13"/>
           <p:cNvSpPr/>
           <p:nvPr/>
         </p:nvSpPr>
@@ -4329,7 +4642,7 @@
             </a:avLst>
           </a:prstGeom>
           <a:solidFill>
-            <a:srgbClr val="F4F7FB"/>
+            <a:srgbClr val="FFFFFF"/>
           </a:solidFill>
           <a:ln w="12700">
             <a:solidFill>
@@ -4341,13 +4654,13 @@
       </p:sp>
       <p:sp>
         <p:nvSpPr>
-          <p:cNvPr id="16" name="Text 13"/>
-          <p:cNvSpPr txBox="1"/>
-          <p:nvPr/>
-        </p:nvSpPr>
-        <p:spPr>
-          <a:xfrm>
-            <a:off x="9098280" y="1783080"/>
+          <p:cNvPr id="17" name="Text 14"/>
+          <p:cNvSpPr txBox="1"/>
+          <p:nvPr/>
+        </p:nvSpPr>
+        <p:spPr>
+          <a:xfrm>
+            <a:off x="9144000" y="1783080"/>
             <a:ext cx="2286000" cy="822960"/>
           </a:xfrm>
           <a:prstGeom prst="rect">
@@ -4380,14 +4693,14 @@
       </p:sp>
       <p:sp>
         <p:nvSpPr>
-          <p:cNvPr id="17" name="Text 14"/>
-          <p:cNvSpPr txBox="1"/>
-          <p:nvPr/>
-        </p:nvSpPr>
-        <p:spPr>
-          <a:xfrm>
-            <a:off x="9098280" y="2697480"/>
-            <a:ext cx="2286000" cy="1463040"/>
+          <p:cNvPr id="18" name="Text 15"/>
+          <p:cNvSpPr txBox="1"/>
+          <p:nvPr/>
+        </p:nvSpPr>
+        <p:spPr>
+          <a:xfrm>
+            <a:off x="9144000" y="2697480"/>
+            <a:ext cx="2240280" cy="1463040"/>
           </a:xfrm>
           <a:prstGeom prst="rect">
             <a:avLst/>
@@ -4419,7 +4732,7 @@
       </p:sp>
       <p:sp>
         <p:nvSpPr>
-          <p:cNvPr id="18" name="Text 15"/>
+          <p:cNvPr id="19" name="Text 16"/>
           <p:cNvSpPr txBox="1"/>
           <p:nvPr/>
         </p:nvSpPr>
@@ -4441,6 +4754,17 @@
             <a:pPr marL="0" indent="0">
               <a:buNone/>
             </a:pPr>
+            <a:r>
+              <a:rPr lang="en-US" sz="2400" dirty="0">
+                <a:solidFill>
+                  <a:srgbClr val="5B6B7C"/>
+                </a:solidFill>
+                <a:latin typeface="Arial" pitchFamily="34" charset="0"/>
+                <a:ea typeface="Arial" pitchFamily="34" charset="-122"/>
+                <a:cs typeface="Arial" pitchFamily="34" charset="-120"/>
+              </a:rPr>
+              <a:t>Testes de privacidade cobrem diretório mínimo, mensagens, notificações e CSV.</a:t>
+            </a:r>
             <a:endParaRPr lang="en-US" sz="2400" dirty="0"/>
           </a:p>
         </p:txBody>
@@ -4459,7 +4783,7 @@
     <p:bg>
       <p:bgPr>
         <a:solidFill>
-          <a:srgbClr val="FFFFFF"/>
+          <a:srgbClr val="F4F7FB"/>
         </a:solidFill>
         <a:effectLst/>
       </p:bgPr>
@@ -4478,9 +4802,66 @@
           <a:chExt cx="0" cy="0"/>
         </a:xfrm>
       </p:grpSpPr>
-      <p:sp>
-        <p:nvSpPr>
-          <p:cNvPr id="2" name="Text 0"/>
+      <p:pic>
+        <p:nvPicPr>
+          <p:cNvPr id="13" name="Imagem 12">
+            <a:extLst>
+              <a:ext uri="{FF2B5EF4-FFF2-40B4-BE49-F238E27FC236}">
+                <a16:creationId xmlns:a16="http://schemas.microsoft.com/office/drawing/2014/main" id="{0A3EEDB6-500B-E8F9-6CEA-CE0142BCA88E}"/>
+              </a:ext>
+            </a:extLst>
+          </p:cNvPr>
+          <p:cNvPicPr>
+            <a:picLocks noChangeAspect="1"/>
+          </p:cNvPicPr>
+          <p:nvPr/>
+        </p:nvPicPr>
+        <p:blipFill>
+          <a:blip r:embed="rId3">
+            <a:alphaModFix amt="20000"/>
+          </a:blip>
+          <a:stretch>
+            <a:fillRect/>
+          </a:stretch>
+        </p:blipFill>
+        <p:spPr>
+          <a:xfrm>
+            <a:off x="0" y="0"/>
+            <a:ext cx="12192000" cy="6858000"/>
+          </a:xfrm>
+          <a:prstGeom prst="rect">
+            <a:avLst/>
+          </a:prstGeom>
+        </p:spPr>
+      </p:pic>
+      <p:sp>
+        <p:nvSpPr>
+          <p:cNvPr id="2" name="Shape 0"/>
+          <p:cNvSpPr/>
+          <p:nvPr/>
+        </p:nvSpPr>
+        <p:spPr>
+          <a:xfrm>
+            <a:off x="0" y="0"/>
+            <a:ext cx="12191695" cy="1810512"/>
+          </a:xfrm>
+          <a:prstGeom prst="rect">
+            <a:avLst/>
+          </a:prstGeom>
+          <a:solidFill>
+            <a:srgbClr val="14202E"/>
+          </a:solidFill>
+          <a:ln w="12700">
+            <a:solidFill>
+              <a:srgbClr val="14202E"/>
+            </a:solidFill>
+            <a:prstDash val="solid"/>
+          </a:ln>
+        </p:spPr>
+      </p:sp>
+      <p:sp>
+        <p:nvSpPr>
+          <p:cNvPr id="3" name="Text 1"/>
           <p:cNvSpPr txBox="1"/>
           <p:nvPr/>
         </p:nvSpPr>
@@ -4505,7 +4886,7 @@
             <a:r>
               <a:rPr lang="en-US" sz="2400" b="1" dirty="0">
                 <a:solidFill>
-                  <a:srgbClr val="C4620A"/>
+                  <a:srgbClr val="6FD3D0"/>
                 </a:solidFill>
                 <a:latin typeface="Arial" pitchFamily="34" charset="0"/>
                 <a:ea typeface="Arial" pitchFamily="34" charset="-122"/>
@@ -4519,7 +4900,7 @@
       </p:sp>
       <p:sp>
         <p:nvSpPr>
-          <p:cNvPr id="3" name="Text 1"/>
+          <p:cNvPr id="4" name="Text 2"/>
           <p:cNvSpPr txBox="1"/>
           <p:nvPr/>
         </p:nvSpPr>
@@ -4544,7 +4925,7 @@
             <a:r>
               <a:rPr lang="en-US" sz="3200" b="1" dirty="0">
                 <a:solidFill>
-                  <a:srgbClr val="14202E"/>
+                  <a:srgbClr val="FFFFFF"/>
                 </a:solidFill>
                 <a:latin typeface="Arial" pitchFamily="34" charset="0"/>
                 <a:ea typeface="Arial" pitchFamily="34" charset="-122"/>
@@ -4558,7 +4939,7 @@
       </p:sp>
       <p:sp>
         <p:nvSpPr>
-          <p:cNvPr id="4" name="Text 2"/>
+          <p:cNvPr id="5" name="Text 3"/>
           <p:cNvSpPr txBox="1"/>
           <p:nvPr/>
         </p:nvSpPr>
@@ -4597,7 +4978,7 @@
       </p:sp>
       <p:sp>
         <p:nvSpPr>
-          <p:cNvPr id="6" name="Shape 3"/>
+          <p:cNvPr id="7" name="Shape 4"/>
           <p:cNvSpPr/>
           <p:nvPr/>
         </p:nvSpPr>
@@ -4612,7 +4993,7 @@
             </a:avLst>
           </a:prstGeom>
           <a:solidFill>
-            <a:srgbClr val="F4F7FB"/>
+            <a:srgbClr val="FFFFFF"/>
           </a:solidFill>
           <a:ln w="12700">
             <a:solidFill>
@@ -4624,14 +5005,14 @@
       </p:sp>
       <p:sp>
         <p:nvSpPr>
-          <p:cNvPr id="7" name="Text 4"/>
-          <p:cNvSpPr txBox="1"/>
-          <p:nvPr/>
-        </p:nvSpPr>
-        <p:spPr>
-          <a:xfrm>
-            <a:off x="777240" y="2103120"/>
-            <a:ext cx="3108960" cy="3749040"/>
+          <p:cNvPr id="8" name="Text 5"/>
+          <p:cNvSpPr txBox="1"/>
+          <p:nvPr/>
+        </p:nvSpPr>
+        <p:spPr>
+          <a:xfrm>
+            <a:off x="822960" y="2103120"/>
+            <a:ext cx="3063240" cy="3749040"/>
           </a:xfrm>
           <a:prstGeom prst="rect">
             <a:avLst/>
@@ -4680,7 +5061,7 @@
       </p:sp>
       <p:sp>
         <p:nvSpPr>
-          <p:cNvPr id="8" name="Shape 5"/>
+          <p:cNvPr id="9" name="Shape 6"/>
           <p:cNvSpPr/>
           <p:nvPr/>
         </p:nvSpPr>
@@ -4695,7 +5076,7 @@
             </a:avLst>
           </a:prstGeom>
           <a:solidFill>
-            <a:srgbClr val="F4F7FB"/>
+            <a:srgbClr val="FFFFFF"/>
           </a:solidFill>
           <a:ln w="12700">
             <a:solidFill>
@@ -4707,14 +5088,14 @@
       </p:sp>
       <p:sp>
         <p:nvSpPr>
-          <p:cNvPr id="9" name="Text 6"/>
-          <p:cNvSpPr txBox="1"/>
-          <p:nvPr/>
-        </p:nvSpPr>
-        <p:spPr>
-          <a:xfrm>
-            <a:off x="4526280" y="2103120"/>
-            <a:ext cx="3108960" cy="3749040"/>
+          <p:cNvPr id="10" name="Text 7"/>
+          <p:cNvSpPr txBox="1"/>
+          <p:nvPr/>
+        </p:nvSpPr>
+        <p:spPr>
+          <a:xfrm>
+            <a:off x="4572000" y="2103120"/>
+            <a:ext cx="3063240" cy="3749040"/>
           </a:xfrm>
           <a:prstGeom prst="rect">
             <a:avLst/>
@@ -4763,7 +5144,7 @@
       </p:sp>
       <p:sp>
         <p:nvSpPr>
-          <p:cNvPr id="10" name="Shape 7"/>
+          <p:cNvPr id="11" name="Shape 8"/>
           <p:cNvSpPr/>
           <p:nvPr/>
         </p:nvSpPr>
@@ -4778,7 +5159,7 @@
             </a:avLst>
           </a:prstGeom>
           <a:solidFill>
-            <a:srgbClr val="F4F7FB"/>
+            <a:srgbClr val="FFFFFF"/>
           </a:solidFill>
           <a:ln w="12700">
             <a:solidFill>
@@ -4790,14 +5171,14 @@
       </p:sp>
       <p:sp>
         <p:nvSpPr>
-          <p:cNvPr id="11" name="Text 8"/>
-          <p:cNvSpPr txBox="1"/>
-          <p:nvPr/>
-        </p:nvSpPr>
-        <p:spPr>
-          <a:xfrm>
-            <a:off x="8275320" y="2103120"/>
-            <a:ext cx="3108960" cy="3749040"/>
+          <p:cNvPr id="12" name="Text 9"/>
+          <p:cNvSpPr txBox="1"/>
+          <p:nvPr/>
+        </p:nvSpPr>
+        <p:spPr>
+          <a:xfrm>
+            <a:off x="8321040" y="2103120"/>
+            <a:ext cx="3063240" cy="3749040"/>
           </a:xfrm>
           <a:prstGeom prst="rect">
             <a:avLst/>
@@ -4858,7 +5239,7 @@
     <p:bg>
       <p:bgPr>
         <a:solidFill>
-          <a:srgbClr val="FFFFFF"/>
+          <a:srgbClr val="F4F7FB"/>
         </a:solidFill>
         <a:effectLst/>
       </p:bgPr>
@@ -4877,9 +5258,66 @@
           <a:chExt cx="0" cy="0"/>
         </a:xfrm>
       </p:grpSpPr>
-      <p:sp>
-        <p:nvSpPr>
-          <p:cNvPr id="2" name="Text 0"/>
+      <p:pic>
+        <p:nvPicPr>
+          <p:cNvPr id="8" name="Imagem 7">
+            <a:extLst>
+              <a:ext uri="{FF2B5EF4-FFF2-40B4-BE49-F238E27FC236}">
+                <a16:creationId xmlns:a16="http://schemas.microsoft.com/office/drawing/2014/main" id="{3CFBEE0C-269B-D076-F555-E1F546BBEF53}"/>
+              </a:ext>
+            </a:extLst>
+          </p:cNvPr>
+          <p:cNvPicPr>
+            <a:picLocks noChangeAspect="1"/>
+          </p:cNvPicPr>
+          <p:nvPr/>
+        </p:nvPicPr>
+        <p:blipFill>
+          <a:blip r:embed="rId3">
+            <a:alphaModFix amt="20000"/>
+          </a:blip>
+          <a:stretch>
+            <a:fillRect/>
+          </a:stretch>
+        </p:blipFill>
+        <p:spPr>
+          <a:xfrm>
+            <a:off x="0" y="0"/>
+            <a:ext cx="12192000" cy="6858000"/>
+          </a:xfrm>
+          <a:prstGeom prst="rect">
+            <a:avLst/>
+          </a:prstGeom>
+        </p:spPr>
+      </p:pic>
+      <p:sp>
+        <p:nvSpPr>
+          <p:cNvPr id="2" name="Shape 0"/>
+          <p:cNvSpPr/>
+          <p:nvPr/>
+        </p:nvSpPr>
+        <p:spPr>
+          <a:xfrm>
+            <a:off x="0" y="0"/>
+            <a:ext cx="12191695" cy="1444752"/>
+          </a:xfrm>
+          <a:prstGeom prst="rect">
+            <a:avLst/>
+          </a:prstGeom>
+          <a:solidFill>
+            <a:srgbClr val="14202E"/>
+          </a:solidFill>
+          <a:ln w="12700">
+            <a:solidFill>
+              <a:srgbClr val="14202E"/>
+            </a:solidFill>
+            <a:prstDash val="solid"/>
+          </a:ln>
+        </p:spPr>
+      </p:sp>
+      <p:sp>
+        <p:nvSpPr>
+          <p:cNvPr id="3" name="Text 1"/>
           <p:cNvSpPr txBox="1"/>
           <p:nvPr/>
         </p:nvSpPr>
@@ -4904,7 +5342,7 @@
             <a:r>
               <a:rPr lang="en-US" sz="2400" b="1" dirty="0">
                 <a:solidFill>
-                  <a:srgbClr val="C4620A"/>
+                  <a:srgbClr val="6FD3D0"/>
                 </a:solidFill>
                 <a:latin typeface="Arial" pitchFamily="34" charset="0"/>
                 <a:ea typeface="Arial" pitchFamily="34" charset="-122"/>
@@ -4918,7 +5356,7 @@
       </p:sp>
       <p:sp>
         <p:nvSpPr>
-          <p:cNvPr id="3" name="Text 1"/>
+          <p:cNvPr id="4" name="Text 2"/>
           <p:cNvSpPr txBox="1"/>
           <p:nvPr/>
         </p:nvSpPr>
@@ -4943,7 +5381,7 @@
             <a:r>
               <a:rPr lang="en-US" sz="3200" b="1" dirty="0">
                 <a:solidFill>
-                  <a:srgbClr val="14202E"/>
+                  <a:srgbClr val="FFFFFF"/>
                 </a:solidFill>
                 <a:latin typeface="Arial" pitchFamily="34" charset="0"/>
                 <a:ea typeface="Arial" pitchFamily="34" charset="-122"/>
@@ -4957,7 +5395,7 @@
       </p:sp>
       <p:sp>
         <p:nvSpPr>
-          <p:cNvPr id="4" name="Text 2"/>
+          <p:cNvPr id="5" name="Text 3"/>
           <p:cNvSpPr txBox="1"/>
           <p:nvPr/>
         </p:nvSpPr>
@@ -4996,14 +5434,14 @@
       </p:sp>
       <p:sp>
         <p:nvSpPr>
-          <p:cNvPr id="6" name="Text 3"/>
-          <p:cNvSpPr txBox="1"/>
-          <p:nvPr/>
-        </p:nvSpPr>
-        <p:spPr>
-          <a:xfrm>
-            <a:off x="548640" y="1463040"/>
-            <a:ext cx="11064240" cy="4754880"/>
+          <p:cNvPr id="7" name="Text 4"/>
+          <p:cNvSpPr txBox="1"/>
+          <p:nvPr/>
+        </p:nvSpPr>
+        <p:spPr>
+          <a:xfrm>
+            <a:off x="548640" y="1691640"/>
+            <a:ext cx="11064240" cy="4572000"/>
           </a:xfrm>
           <a:prstGeom prst="rect">
             <a:avLst/>
@@ -5030,7 +5468,7 @@
                 <a:ea typeface="Arial" pitchFamily="34" charset="-122"/>
                 <a:cs typeface="Arial" pitchFamily="34" charset="-120"/>
               </a:rPr>
-              <a:t>ASSOCIAÇÃO BRASILEIRA DE NORMAS TÉCNICAS. NBR 6023: informação e documentação – referências. Rio de Janeiro: ABNT, 2025.</a:t>
+              <a:t>ASSOCIAÇÃO BRASILEIRA DE NORMAS TÉCNICAS. NBR 6023: informação e documentação: referências. Rio de Janeiro: ABNT, 2025.</a:t>
             </a:r>
             <a:endParaRPr lang="en-US" sz="2400" dirty="0"/>
           </a:p>
@@ -5130,7 +5568,7 @@
     <p:bg>
       <p:bgPr>
         <a:solidFill>
-          <a:srgbClr val="FFFFFF"/>
+          <a:srgbClr val="14202E"/>
         </a:solidFill>
         <a:effectLst/>
       </p:bgPr>
@@ -5151,14 +5589,14 @@
       </p:grpSpPr>
       <p:sp>
         <p:nvSpPr>
-          <p:cNvPr id="2" name="Text 0"/>
-          <p:cNvSpPr txBox="1"/>
-          <p:nvPr/>
-        </p:nvSpPr>
-        <p:spPr>
-          <a:xfrm>
-            <a:off x="548640" y="274320"/>
-            <a:ext cx="11064240" cy="365760"/>
+          <p:cNvPr id="3" name="Text 0"/>
+          <p:cNvSpPr txBox="1"/>
+          <p:nvPr/>
+        </p:nvSpPr>
+        <p:spPr>
+          <a:xfrm>
+            <a:off x="548640" y="320040"/>
+            <a:ext cx="10972800" cy="365760"/>
           </a:xfrm>
           <a:prstGeom prst="rect">
             <a:avLst/>
@@ -5176,7 +5614,7 @@
             <a:r>
               <a:rPr lang="en-US" sz="2400" b="1" dirty="0">
                 <a:solidFill>
-                  <a:srgbClr val="C4620A"/>
+                  <a:srgbClr val="6FD3D0"/>
                 </a:solidFill>
                 <a:latin typeface="Arial" pitchFamily="34" charset="0"/>
                 <a:ea typeface="Arial" pitchFamily="34" charset="-122"/>
@@ -5190,13 +5628,91 @@
       </p:sp>
       <p:sp>
         <p:nvSpPr>
-          <p:cNvPr id="3" name="Text 1"/>
-          <p:cNvSpPr txBox="1"/>
-          <p:nvPr/>
-        </p:nvSpPr>
-        <p:spPr>
-          <a:xfrm>
-            <a:off x="548640" y="713232"/>
+          <p:cNvPr id="4" name="Text 1"/>
+          <p:cNvSpPr txBox="1"/>
+          <p:nvPr/>
+        </p:nvSpPr>
+        <p:spPr>
+          <a:xfrm>
+            <a:off x="548640" y="731520"/>
+            <a:ext cx="10972800" cy="914400"/>
+          </a:xfrm>
+          <a:prstGeom prst="rect">
+            <a:avLst/>
+          </a:prstGeom>
+          <a:noFill/>
+          <a:ln/>
+        </p:spPr>
+        <p:txBody>
+          <a:bodyPr wrap="square" lIns="0" tIns="0" rIns="0" bIns="0" rtlCol="0" anchor="t"/>
+          <a:lstStyle/>
+          <a:p>
+            <a:pPr marL="0" indent="0">
+              <a:buNone/>
+            </a:pPr>
+            <a:r>
+              <a:rPr lang="en-US" sz="5400" b="1" dirty="0">
+                <a:solidFill>
+                  <a:srgbClr val="FFFFFF"/>
+                </a:solidFill>
+                <a:latin typeface="Arial" pitchFamily="34" charset="0"/>
+                <a:ea typeface="Arial" pitchFamily="34" charset="-122"/>
+                <a:cs typeface="Arial" pitchFamily="34" charset="-120"/>
+              </a:rPr>
+              <a:t>Obrigado.</a:t>
+            </a:r>
+            <a:endParaRPr lang="en-US" sz="5400" dirty="0"/>
+          </a:p>
+        </p:txBody>
+      </p:sp>
+      <p:sp>
+        <p:nvSpPr>
+          <p:cNvPr id="5" name="Text 2"/>
+          <p:cNvSpPr txBox="1"/>
+          <p:nvPr/>
+        </p:nvSpPr>
+        <p:spPr>
+          <a:xfrm>
+            <a:off x="548640" y="2286000"/>
+            <a:ext cx="11064240" cy="1097280"/>
+          </a:xfrm>
+          <a:prstGeom prst="rect">
+            <a:avLst/>
+          </a:prstGeom>
+          <a:noFill/>
+          <a:ln/>
+        </p:spPr>
+        <p:txBody>
+          <a:bodyPr wrap="square" lIns="0" tIns="0" rIns="0" bIns="0" rtlCol="0" anchor="t"/>
+          <a:lstStyle/>
+          <a:p>
+            <a:pPr marL="0" indent="0">
+              <a:buNone/>
+            </a:pPr>
+            <a:r>
+              <a:rPr lang="en-US" sz="2800" dirty="0">
+                <a:solidFill>
+                  <a:srgbClr val="FFFFFF"/>
+                </a:solidFill>
+                <a:latin typeface="Arial" pitchFamily="34" charset="0"/>
+                <a:ea typeface="Arial" pitchFamily="34" charset="-122"/>
+                <a:cs typeface="Arial" pitchFamily="34" charset="-120"/>
+              </a:rPr>
+              <a:t>Ao professor Altemar Sales de Oliveira, à instituição e à comunidade escolar que apoiou o projeto.</a:t>
+            </a:r>
+            <a:endParaRPr lang="en-US" sz="2800" dirty="0"/>
+          </a:p>
+        </p:txBody>
+      </p:sp>
+      <p:sp>
+        <p:nvSpPr>
+          <p:cNvPr id="6" name="Text 3"/>
+          <p:cNvSpPr txBox="1"/>
+          <p:nvPr/>
+        </p:nvSpPr>
+        <p:spPr>
+          <a:xfrm>
+            <a:off x="548640" y="3657600"/>
             <a:ext cx="11064240" cy="914400"/>
           </a:xfrm>
           <a:prstGeom prst="rect">
@@ -5213,23 +5729,62 @@
               <a:buNone/>
             </a:pPr>
             <a:r>
-              <a:rPr lang="en-US" sz="3200" b="1" dirty="0">
-                <a:solidFill>
-                  <a:srgbClr val="14202E"/>
-                </a:solidFill>
-                <a:latin typeface="Arial" pitchFamily="34" charset="0"/>
-                <a:ea typeface="Arial" pitchFamily="34" charset="-122"/>
-                <a:cs typeface="Arial" pitchFamily="34" charset="-120"/>
-              </a:rPr>
-              <a:t>Obrigado.</a:t>
-            </a:r>
-            <a:endParaRPr lang="en-US" sz="3200" dirty="0"/>
-          </a:p>
-        </p:txBody>
-      </p:sp>
-      <p:sp>
-        <p:nvSpPr>
-          <p:cNvPr id="4" name="Text 2"/>
+              <a:rPr lang="en-US" sz="2400" dirty="0">
+                <a:solidFill>
+                  <a:srgbClr val="A9B6C6"/>
+                </a:solidFill>
+                <a:latin typeface="Arial" pitchFamily="34" charset="0"/>
+                <a:ea typeface="Arial" pitchFamily="34" charset="-122"/>
+                <a:cs typeface="Arial" pitchFamily="34" charset="-120"/>
+              </a:rPr>
+              <a:t>Flavio Gabrig Ferreira, Richardson Conceição Ferreira e Lealdo Coelho Válido de Jesus</a:t>
+            </a:r>
+            <a:endParaRPr lang="en-US" sz="2400" dirty="0"/>
+          </a:p>
+        </p:txBody>
+      </p:sp>
+      <p:sp>
+        <p:nvSpPr>
+          <p:cNvPr id="7" name="Text 4"/>
+          <p:cNvSpPr txBox="1"/>
+          <p:nvPr/>
+        </p:nvSpPr>
+        <p:spPr>
+          <a:xfrm>
+            <a:off x="548640" y="4937760"/>
+            <a:ext cx="11064240" cy="457200"/>
+          </a:xfrm>
+          <a:prstGeom prst="rect">
+            <a:avLst/>
+          </a:prstGeom>
+          <a:noFill/>
+          <a:ln/>
+        </p:spPr>
+        <p:txBody>
+          <a:bodyPr wrap="square" lIns="0" tIns="0" rIns="0" bIns="0" rtlCol="0" anchor="t"/>
+          <a:lstStyle/>
+          <a:p>
+            <a:pPr marL="0" indent="0">
+              <a:buNone/>
+            </a:pPr>
+            <a:r>
+              <a:rPr lang="en-US" sz="2400" b="1" dirty="0">
+                <a:solidFill>
+                  <a:srgbClr val="8FB4F5"/>
+                </a:solidFill>
+                <a:latin typeface="Arial" pitchFamily="34" charset="0"/>
+                <a:ea typeface="Arial" pitchFamily="34" charset="-122"/>
+                <a:cs typeface="Arial" pitchFamily="34" charset="-120"/>
+              </a:rPr>
+              <a:t>github.com/richaferreira/Safe_Student</a:t>
+            </a:r>
+            <a:endParaRPr lang="en-US" sz="2400" dirty="0"/>
+          </a:p>
+        </p:txBody>
+      </p:sp>
+      <p:sp>
+        <p:nvSpPr>
+          <p:cNvPr id="8" name="Text 5"/>
           <p:cNvSpPr txBox="1"/>
           <p:nvPr/>
         </p:nvSpPr>
@@ -5254,130 +5809,13 @@
             <a:r>
               <a:rPr lang="en-US" sz="2400" dirty="0">
                 <a:solidFill>
-                  <a:srgbClr val="5B6B7C"/>
+                  <a:srgbClr val="A9B6C6"/>
                 </a:solidFill>
                 <a:latin typeface="Arial" pitchFamily="34" charset="0"/>
                 <a:ea typeface="Arial" pitchFamily="34" charset="-122"/>
                 <a:cs typeface="Arial" pitchFamily="34" charset="-120"/>
               </a:rPr>
               <a:t>17 / 17</a:t>
-            </a:r>
-            <a:endParaRPr lang="en-US" sz="2400" dirty="0"/>
-          </a:p>
-        </p:txBody>
-      </p:sp>
-      <p:sp>
-        <p:nvSpPr>
-          <p:cNvPr id="6" name="Text 3"/>
-          <p:cNvSpPr txBox="1"/>
-          <p:nvPr/>
-        </p:nvSpPr>
-        <p:spPr>
-          <a:xfrm>
-            <a:off x="548640" y="1920240"/>
-            <a:ext cx="11064240" cy="1097280"/>
-          </a:xfrm>
-          <a:prstGeom prst="rect">
-            <a:avLst/>
-          </a:prstGeom>
-          <a:noFill/>
-          <a:ln/>
-        </p:spPr>
-        <p:txBody>
-          <a:bodyPr wrap="square" lIns="0" tIns="0" rIns="0" bIns="0" rtlCol="0" anchor="t"/>
-          <a:lstStyle/>
-          <a:p>
-            <a:pPr marL="0" indent="0">
-              <a:buNone/>
-            </a:pPr>
-            <a:r>
-              <a:rPr lang="en-US" sz="2800" dirty="0">
-                <a:solidFill>
-                  <a:srgbClr val="14202E"/>
-                </a:solidFill>
-                <a:latin typeface="Arial" pitchFamily="34" charset="0"/>
-                <a:ea typeface="Arial" pitchFamily="34" charset="-122"/>
-                <a:cs typeface="Arial" pitchFamily="34" charset="-120"/>
-              </a:rPr>
-              <a:t>Ao professor Altemar Sales de Oliveira, à instituição e à comunidade escolar que apoiou o projeto.</a:t>
-            </a:r>
-            <a:endParaRPr lang="en-US" sz="2800" dirty="0"/>
-          </a:p>
-        </p:txBody>
-      </p:sp>
-      <p:sp>
-        <p:nvSpPr>
-          <p:cNvPr id="7" name="Text 4"/>
-          <p:cNvSpPr txBox="1"/>
-          <p:nvPr/>
-        </p:nvSpPr>
-        <p:spPr>
-          <a:xfrm>
-            <a:off x="548640" y="3474720"/>
-            <a:ext cx="11064240" cy="914400"/>
-          </a:xfrm>
-          <a:prstGeom prst="rect">
-            <a:avLst/>
-          </a:prstGeom>
-          <a:noFill/>
-          <a:ln/>
-        </p:spPr>
-        <p:txBody>
-          <a:bodyPr wrap="square" lIns="0" tIns="0" rIns="0" bIns="0" rtlCol="0" anchor="t"/>
-          <a:lstStyle/>
-          <a:p>
-            <a:pPr marL="0" indent="0">
-              <a:buNone/>
-            </a:pPr>
-            <a:r>
-              <a:rPr lang="en-US" sz="2400" dirty="0">
-                <a:solidFill>
-                  <a:srgbClr val="5B6B7C"/>
-                </a:solidFill>
-                <a:latin typeface="Arial" pitchFamily="34" charset="0"/>
-                <a:ea typeface="Arial" pitchFamily="34" charset="-122"/>
-                <a:cs typeface="Arial" pitchFamily="34" charset="-120"/>
-              </a:rPr>
-              <a:t>Flavio Gabrig Ferreira · Richardson Conceição Ferreira · Lealdo Coelho Válido de Jesus</a:t>
-            </a:r>
-            <a:endParaRPr lang="en-US" sz="2400" dirty="0"/>
-          </a:p>
-        </p:txBody>
-      </p:sp>
-      <p:sp>
-        <p:nvSpPr>
-          <p:cNvPr id="8" name="Text 5"/>
-          <p:cNvSpPr txBox="1"/>
-          <p:nvPr/>
-        </p:nvSpPr>
-        <p:spPr>
-          <a:xfrm>
-            <a:off x="548640" y="4754880"/>
-            <a:ext cx="11064240" cy="457200"/>
-          </a:xfrm>
-          <a:prstGeom prst="rect">
-            <a:avLst/>
-          </a:prstGeom>
-          <a:noFill/>
-          <a:ln/>
-        </p:spPr>
-        <p:txBody>
-          <a:bodyPr wrap="square" lIns="0" tIns="0" rIns="0" bIns="0" rtlCol="0" anchor="t"/>
-          <a:lstStyle/>
-          <a:p>
-            <a:pPr marL="0" indent="0">
-              <a:buNone/>
-            </a:pPr>
-            <a:r>
-              <a:rPr lang="en-US" sz="2400" b="1" dirty="0">
-                <a:solidFill>
-                  <a:srgbClr val="1D5FD0"/>
-                </a:solidFill>
-                <a:latin typeface="Arial" pitchFamily="34" charset="0"/>
-                <a:ea typeface="Arial" pitchFamily="34" charset="-122"/>
-                <a:cs typeface="Arial" pitchFamily="34" charset="-120"/>
-              </a:rPr>
-              <a:t>github.com/richaferreira/Safe_Student</a:t>
             </a:r>
             <a:endParaRPr lang="en-US" sz="2400" dirty="0"/>
           </a:p>
@@ -5397,7 +5835,7 @@
     <p:bg>
       <p:bgPr>
         <a:solidFill>
-          <a:srgbClr val="FFFFFF"/>
+          <a:srgbClr val="F4F7FB"/>
         </a:solidFill>
         <a:effectLst/>
       </p:bgPr>
@@ -5416,9 +5854,66 @@
           <a:chExt cx="0" cy="0"/>
         </a:xfrm>
       </p:grpSpPr>
-      <p:sp>
-        <p:nvSpPr>
-          <p:cNvPr id="2" name="Text 0"/>
+      <p:pic>
+        <p:nvPicPr>
+          <p:cNvPr id="15" name="Imagem 14">
+            <a:extLst>
+              <a:ext uri="{FF2B5EF4-FFF2-40B4-BE49-F238E27FC236}">
+                <a16:creationId xmlns:a16="http://schemas.microsoft.com/office/drawing/2014/main" id="{04F13E4B-E63A-E555-EF5B-C2C0CEC0047D}"/>
+              </a:ext>
+            </a:extLst>
+          </p:cNvPr>
+          <p:cNvPicPr>
+            <a:picLocks noChangeAspect="1"/>
+          </p:cNvPicPr>
+          <p:nvPr/>
+        </p:nvPicPr>
+        <p:blipFill>
+          <a:blip r:embed="rId3">
+            <a:alphaModFix amt="20000"/>
+          </a:blip>
+          <a:stretch>
+            <a:fillRect/>
+          </a:stretch>
+        </p:blipFill>
+        <p:spPr>
+          <a:xfrm>
+            <a:off x="0" y="0"/>
+            <a:ext cx="12192000" cy="6858000"/>
+          </a:xfrm>
+          <a:prstGeom prst="rect">
+            <a:avLst/>
+          </a:prstGeom>
+        </p:spPr>
+      </p:pic>
+      <p:sp>
+        <p:nvSpPr>
+          <p:cNvPr id="2" name="Shape 0"/>
+          <p:cNvSpPr/>
+          <p:nvPr/>
+        </p:nvSpPr>
+        <p:spPr>
+          <a:xfrm>
+            <a:off x="0" y="0"/>
+            <a:ext cx="12191695" cy="1810512"/>
+          </a:xfrm>
+          <a:prstGeom prst="rect">
+            <a:avLst/>
+          </a:prstGeom>
+          <a:solidFill>
+            <a:srgbClr val="14202E"/>
+          </a:solidFill>
+          <a:ln w="12700">
+            <a:solidFill>
+              <a:srgbClr val="14202E"/>
+            </a:solidFill>
+            <a:prstDash val="solid"/>
+          </a:ln>
+        </p:spPr>
+      </p:sp>
+      <p:sp>
+        <p:nvSpPr>
+          <p:cNvPr id="3" name="Text 1"/>
           <p:cNvSpPr txBox="1"/>
           <p:nvPr/>
         </p:nvSpPr>
@@ -5443,21 +5938,21 @@
             <a:r>
               <a:rPr lang="en-US" sz="2400" b="1" dirty="0">
                 <a:solidFill>
-                  <a:srgbClr val="C4620A"/>
-                </a:solidFill>
-                <a:latin typeface="Arial" pitchFamily="34" charset="0"/>
-                <a:ea typeface="Arial" pitchFamily="34" charset="-122"/>
-                <a:cs typeface="Arial" pitchFamily="34" charset="-120"/>
-              </a:rPr>
-              <a:t>INTRODUÇÃO · CONTEXTO</a:t>
-            </a:r>
-            <a:endParaRPr lang="en-US" sz="2400" dirty="0"/>
-          </a:p>
-        </p:txBody>
-      </p:sp>
-      <p:sp>
-        <p:nvSpPr>
-          <p:cNvPr id="3" name="Text 1"/>
+                  <a:srgbClr val="6FD3D0"/>
+                </a:solidFill>
+                <a:latin typeface="Arial" pitchFamily="34" charset="0"/>
+                <a:ea typeface="Arial" pitchFamily="34" charset="-122"/>
+                <a:cs typeface="Arial" pitchFamily="34" charset="-120"/>
+              </a:rPr>
+              <a:t>INTRODUÇÃO: CONTEXTO</a:t>
+            </a:r>
+            <a:endParaRPr lang="en-US" sz="2400" dirty="0"/>
+          </a:p>
+        </p:txBody>
+      </p:sp>
+      <p:sp>
+        <p:nvSpPr>
+          <p:cNvPr id="4" name="Text 2"/>
           <p:cNvSpPr txBox="1"/>
           <p:nvPr/>
         </p:nvSpPr>
@@ -5482,7 +5977,7 @@
             <a:r>
               <a:rPr lang="en-US" sz="3200" b="1" dirty="0">
                 <a:solidFill>
-                  <a:srgbClr val="14202E"/>
+                  <a:srgbClr val="FFFFFF"/>
                 </a:solidFill>
                 <a:latin typeface="Arial" pitchFamily="34" charset="0"/>
                 <a:ea typeface="Arial" pitchFamily="34" charset="-122"/>
@@ -5496,7 +5991,7 @@
       </p:sp>
       <p:sp>
         <p:nvSpPr>
-          <p:cNvPr id="4" name="Text 2"/>
+          <p:cNvPr id="5" name="Text 3"/>
           <p:cNvSpPr txBox="1"/>
           <p:nvPr/>
         </p:nvSpPr>
@@ -5535,7 +6030,7 @@
       </p:sp>
       <p:sp>
         <p:nvSpPr>
-          <p:cNvPr id="6" name="Shape 3"/>
+          <p:cNvPr id="7" name="Shape 4"/>
           <p:cNvSpPr/>
           <p:nvPr/>
         </p:nvSpPr>
@@ -5550,7 +6045,7 @@
             </a:avLst>
           </a:prstGeom>
           <a:solidFill>
-            <a:srgbClr val="F4F7FB"/>
+            <a:srgbClr val="FFFFFF"/>
           </a:solidFill>
           <a:ln w="12700">
             <a:solidFill>
@@ -5562,14 +6057,14 @@
       </p:sp>
       <p:sp>
         <p:nvSpPr>
-          <p:cNvPr id="7" name="Text 4"/>
-          <p:cNvSpPr txBox="1"/>
-          <p:nvPr/>
-        </p:nvSpPr>
-        <p:spPr>
-          <a:xfrm>
-            <a:off x="777240" y="2148840"/>
-            <a:ext cx="4983480" cy="1645920"/>
+          <p:cNvPr id="8" name="Text 5"/>
+          <p:cNvSpPr txBox="1"/>
+          <p:nvPr/>
+        </p:nvSpPr>
+        <p:spPr>
+          <a:xfrm>
+            <a:off x="822960" y="2148840"/>
+            <a:ext cx="4937760" cy="1645920"/>
           </a:xfrm>
           <a:prstGeom prst="rect">
             <a:avLst/>
@@ -5618,7 +6113,7 @@
       </p:sp>
       <p:sp>
         <p:nvSpPr>
-          <p:cNvPr id="8" name="Shape 5"/>
+          <p:cNvPr id="9" name="Shape 6"/>
           <p:cNvSpPr/>
           <p:nvPr/>
         </p:nvSpPr>
@@ -5633,7 +6128,7 @@
             </a:avLst>
           </a:prstGeom>
           <a:solidFill>
-            <a:srgbClr val="F4F7FB"/>
+            <a:srgbClr val="FFFFFF"/>
           </a:solidFill>
           <a:ln w="12700">
             <a:solidFill>
@@ -5645,14 +6140,14 @@
       </p:sp>
       <p:sp>
         <p:nvSpPr>
-          <p:cNvPr id="9" name="Text 6"/>
-          <p:cNvSpPr txBox="1"/>
-          <p:nvPr/>
-        </p:nvSpPr>
-        <p:spPr>
-          <a:xfrm>
-            <a:off x="6400800" y="2148840"/>
-            <a:ext cx="4983480" cy="1645920"/>
+          <p:cNvPr id="10" name="Text 7"/>
+          <p:cNvSpPr txBox="1"/>
+          <p:nvPr/>
+        </p:nvSpPr>
+        <p:spPr>
+          <a:xfrm>
+            <a:off x="6446520" y="2148840"/>
+            <a:ext cx="4937760" cy="1645920"/>
           </a:xfrm>
           <a:prstGeom prst="rect">
             <a:avLst/>
@@ -5701,7 +6196,7 @@
       </p:sp>
       <p:sp>
         <p:nvSpPr>
-          <p:cNvPr id="10" name="Shape 7"/>
+          <p:cNvPr id="11" name="Shape 8"/>
           <p:cNvSpPr/>
           <p:nvPr/>
         </p:nvSpPr>
@@ -5716,7 +6211,7 @@
             </a:avLst>
           </a:prstGeom>
           <a:solidFill>
-            <a:srgbClr val="F4F7FB"/>
+            <a:srgbClr val="FFFFFF"/>
           </a:solidFill>
           <a:ln w="12700">
             <a:solidFill>
@@ -5728,14 +6223,14 @@
       </p:sp>
       <p:sp>
         <p:nvSpPr>
-          <p:cNvPr id="11" name="Text 8"/>
-          <p:cNvSpPr txBox="1"/>
-          <p:nvPr/>
-        </p:nvSpPr>
-        <p:spPr>
-          <a:xfrm>
-            <a:off x="777240" y="4343400"/>
-            <a:ext cx="4983480" cy="1645920"/>
+          <p:cNvPr id="12" name="Text 9"/>
+          <p:cNvSpPr txBox="1"/>
+          <p:nvPr/>
+        </p:nvSpPr>
+        <p:spPr>
+          <a:xfrm>
+            <a:off x="822960" y="4343400"/>
+            <a:ext cx="4937760" cy="1645920"/>
           </a:xfrm>
           <a:prstGeom prst="rect">
             <a:avLst/>
@@ -5784,7 +6279,7 @@
       </p:sp>
       <p:sp>
         <p:nvSpPr>
-          <p:cNvPr id="12" name="Shape 9"/>
+          <p:cNvPr id="13" name="Shape 10"/>
           <p:cNvSpPr/>
           <p:nvPr/>
         </p:nvSpPr>
@@ -5799,7 +6294,7 @@
             </a:avLst>
           </a:prstGeom>
           <a:solidFill>
-            <a:srgbClr val="F4F7FB"/>
+            <a:srgbClr val="FFFFFF"/>
           </a:solidFill>
           <a:ln w="12700">
             <a:solidFill>
@@ -5811,14 +6306,14 @@
       </p:sp>
       <p:sp>
         <p:nvSpPr>
-          <p:cNvPr id="13" name="Text 10"/>
-          <p:cNvSpPr txBox="1"/>
-          <p:nvPr/>
-        </p:nvSpPr>
-        <p:spPr>
-          <a:xfrm>
-            <a:off x="6400800" y="4343400"/>
-            <a:ext cx="4983480" cy="1645920"/>
+          <p:cNvPr id="14" name="Text 11"/>
+          <p:cNvSpPr txBox="1"/>
+          <p:nvPr/>
+        </p:nvSpPr>
+        <p:spPr>
+          <a:xfrm>
+            <a:off x="6446520" y="4343400"/>
+            <a:ext cx="4937760" cy="1645920"/>
           </a:xfrm>
           <a:prstGeom prst="rect">
             <a:avLst/>
@@ -5879,7 +6374,7 @@
     <p:bg>
       <p:bgPr>
         <a:solidFill>
-          <a:srgbClr val="FFFFFF"/>
+          <a:srgbClr val="F4F7FB"/>
         </a:solidFill>
         <a:effectLst/>
       </p:bgPr>
@@ -5898,9 +6393,66 @@
           <a:chExt cx="0" cy="0"/>
         </a:xfrm>
       </p:grpSpPr>
-      <p:sp>
-        <p:nvSpPr>
-          <p:cNvPr id="2" name="Text 0"/>
+      <p:pic>
+        <p:nvPicPr>
+          <p:cNvPr id="13" name="Imagem 12">
+            <a:extLst>
+              <a:ext uri="{FF2B5EF4-FFF2-40B4-BE49-F238E27FC236}">
+                <a16:creationId xmlns:a16="http://schemas.microsoft.com/office/drawing/2014/main" id="{92800291-4E50-9851-5DA4-3FCA754C171C}"/>
+              </a:ext>
+            </a:extLst>
+          </p:cNvPr>
+          <p:cNvPicPr>
+            <a:picLocks noChangeAspect="1"/>
+          </p:cNvPicPr>
+          <p:nvPr/>
+        </p:nvPicPr>
+        <p:blipFill>
+          <a:blip r:embed="rId3">
+            <a:alphaModFix amt="20000"/>
+          </a:blip>
+          <a:stretch>
+            <a:fillRect/>
+          </a:stretch>
+        </p:blipFill>
+        <p:spPr>
+          <a:xfrm>
+            <a:off x="0" y="0"/>
+            <a:ext cx="12192000" cy="6858000"/>
+          </a:xfrm>
+          <a:prstGeom prst="rect">
+            <a:avLst/>
+          </a:prstGeom>
+        </p:spPr>
+      </p:pic>
+      <p:sp>
+        <p:nvSpPr>
+          <p:cNvPr id="2" name="Shape 0"/>
+          <p:cNvSpPr/>
+          <p:nvPr/>
+        </p:nvSpPr>
+        <p:spPr>
+          <a:xfrm>
+            <a:off x="0" y="0"/>
+            <a:ext cx="12191695" cy="1810512"/>
+          </a:xfrm>
+          <a:prstGeom prst="rect">
+            <a:avLst/>
+          </a:prstGeom>
+          <a:solidFill>
+            <a:srgbClr val="14202E"/>
+          </a:solidFill>
+          <a:ln w="12700">
+            <a:solidFill>
+              <a:srgbClr val="14202E"/>
+            </a:solidFill>
+            <a:prstDash val="solid"/>
+          </a:ln>
+        </p:spPr>
+      </p:sp>
+      <p:sp>
+        <p:nvSpPr>
+          <p:cNvPr id="3" name="Text 1"/>
           <p:cNvSpPr txBox="1"/>
           <p:nvPr/>
         </p:nvSpPr>
@@ -5925,21 +6477,21 @@
             <a:r>
               <a:rPr lang="en-US" sz="2400" b="1" dirty="0">
                 <a:solidFill>
-                  <a:srgbClr val="C4620A"/>
-                </a:solidFill>
-                <a:latin typeface="Arial" pitchFamily="34" charset="0"/>
-                <a:ea typeface="Arial" pitchFamily="34" charset="-122"/>
-                <a:cs typeface="Arial" pitchFamily="34" charset="-120"/>
-              </a:rPr>
-              <a:t>INTRODUÇÃO · PROBLEMÁTICA</a:t>
-            </a:r>
-            <a:endParaRPr lang="en-US" sz="2400" dirty="0"/>
-          </a:p>
-        </p:txBody>
-      </p:sp>
-      <p:sp>
-        <p:nvSpPr>
-          <p:cNvPr id="3" name="Text 1"/>
+                  <a:srgbClr val="6FD3D0"/>
+                </a:solidFill>
+                <a:latin typeface="Arial" pitchFamily="34" charset="0"/>
+                <a:ea typeface="Arial" pitchFamily="34" charset="-122"/>
+                <a:cs typeface="Arial" pitchFamily="34" charset="-120"/>
+              </a:rPr>
+              <a:t>INTRODUÇÃO: PROBLEMÁTICA</a:t>
+            </a:r>
+            <a:endParaRPr lang="en-US" sz="2400" dirty="0"/>
+          </a:p>
+        </p:txBody>
+      </p:sp>
+      <p:sp>
+        <p:nvSpPr>
+          <p:cNvPr id="4" name="Text 2"/>
           <p:cNvSpPr txBox="1"/>
           <p:nvPr/>
         </p:nvSpPr>
@@ -5964,7 +6516,7 @@
             <a:r>
               <a:rPr lang="en-US" sz="3200" b="1" dirty="0">
                 <a:solidFill>
-                  <a:srgbClr val="14202E"/>
+                  <a:srgbClr val="FFFFFF"/>
                 </a:solidFill>
                 <a:latin typeface="Arial" pitchFamily="34" charset="0"/>
                 <a:ea typeface="Arial" pitchFamily="34" charset="-122"/>
@@ -5978,7 +6530,7 @@
       </p:sp>
       <p:sp>
         <p:nvSpPr>
-          <p:cNvPr id="4" name="Text 2"/>
+          <p:cNvPr id="5" name="Text 3"/>
           <p:cNvSpPr txBox="1"/>
           <p:nvPr/>
         </p:nvSpPr>
@@ -6017,7 +6569,7 @@
       </p:sp>
       <p:sp>
         <p:nvSpPr>
-          <p:cNvPr id="6" name="Shape 3"/>
+          <p:cNvPr id="7" name="Shape 4"/>
           <p:cNvSpPr/>
           <p:nvPr/>
         </p:nvSpPr>
@@ -6032,7 +6584,7 @@
             </a:avLst>
           </a:prstGeom>
           <a:solidFill>
-            <a:srgbClr val="F4F7FB"/>
+            <a:srgbClr val="FFFFFF"/>
           </a:solidFill>
           <a:ln w="12700">
             <a:solidFill>
@@ -6044,14 +6596,14 @@
       </p:sp>
       <p:sp>
         <p:nvSpPr>
-          <p:cNvPr id="7" name="Text 4"/>
-          <p:cNvSpPr txBox="1"/>
-          <p:nvPr/>
-        </p:nvSpPr>
-        <p:spPr>
-          <a:xfrm>
-            <a:off x="777240" y="2148840"/>
-            <a:ext cx="3108960" cy="3657600"/>
+          <p:cNvPr id="8" name="Text 5"/>
+          <p:cNvSpPr txBox="1"/>
+          <p:nvPr/>
+        </p:nvSpPr>
+        <p:spPr>
+          <a:xfrm>
+            <a:off x="822960" y="2148840"/>
+            <a:ext cx="3063240" cy="3657600"/>
           </a:xfrm>
           <a:prstGeom prst="rect">
             <a:avLst/>
@@ -6075,7 +6627,7 @@
                 <a:ea typeface="Arial" pitchFamily="34" charset="-122"/>
                 <a:cs typeface="Arial" pitchFamily="34" charset="-120"/>
               </a:rPr>
-              <a:t>01 · Baixa visibilidade</a:t>
+              <a:t>01. Baixa visibilidade</a:t>
             </a:r>
             <a:endParaRPr lang="en-US" sz="2400" dirty="0"/>
           </a:p>
@@ -6100,7 +6652,7 @@
       </p:sp>
       <p:sp>
         <p:nvSpPr>
-          <p:cNvPr id="8" name="Shape 5"/>
+          <p:cNvPr id="9" name="Shape 6"/>
           <p:cNvSpPr/>
           <p:nvPr/>
         </p:nvSpPr>
@@ -6115,7 +6667,7 @@
             </a:avLst>
           </a:prstGeom>
           <a:solidFill>
-            <a:srgbClr val="F4F7FB"/>
+            <a:srgbClr val="FFFFFF"/>
           </a:solidFill>
           <a:ln w="12700">
             <a:solidFill>
@@ -6127,14 +6679,14 @@
       </p:sp>
       <p:sp>
         <p:nvSpPr>
-          <p:cNvPr id="9" name="Text 6"/>
-          <p:cNvSpPr txBox="1"/>
-          <p:nvPr/>
-        </p:nvSpPr>
-        <p:spPr>
-          <a:xfrm>
-            <a:off x="4526280" y="2148840"/>
-            <a:ext cx="3108960" cy="3657600"/>
+          <p:cNvPr id="10" name="Text 7"/>
+          <p:cNvSpPr txBox="1"/>
+          <p:nvPr/>
+        </p:nvSpPr>
+        <p:spPr>
+          <a:xfrm>
+            <a:off x="4572000" y="2148840"/>
+            <a:ext cx="3063240" cy="3657600"/>
           </a:xfrm>
           <a:prstGeom prst="rect">
             <a:avLst/>
@@ -6158,7 +6710,7 @@
                 <a:ea typeface="Arial" pitchFamily="34" charset="-122"/>
                 <a:cs typeface="Arial" pitchFamily="34" charset="-120"/>
               </a:rPr>
-              <a:t>02 · Registros manuais</a:t>
+              <a:t>02. Registros manuais</a:t>
             </a:r>
             <a:endParaRPr lang="en-US" sz="2400" dirty="0"/>
           </a:p>
@@ -6183,7 +6735,7 @@
       </p:sp>
       <p:sp>
         <p:nvSpPr>
-          <p:cNvPr id="10" name="Shape 7"/>
+          <p:cNvPr id="11" name="Shape 8"/>
           <p:cNvSpPr/>
           <p:nvPr/>
         </p:nvSpPr>
@@ -6198,7 +6750,7 @@
             </a:avLst>
           </a:prstGeom>
           <a:solidFill>
-            <a:srgbClr val="F4F7FB"/>
+            <a:srgbClr val="FFFFFF"/>
           </a:solidFill>
           <a:ln w="12700">
             <a:solidFill>
@@ -6210,14 +6762,14 @@
       </p:sp>
       <p:sp>
         <p:nvSpPr>
-          <p:cNvPr id="11" name="Text 8"/>
-          <p:cNvSpPr txBox="1"/>
-          <p:nvPr/>
-        </p:nvSpPr>
-        <p:spPr>
-          <a:xfrm>
-            <a:off x="8275320" y="2148840"/>
-            <a:ext cx="3108960" cy="3657600"/>
+          <p:cNvPr id="12" name="Text 9"/>
+          <p:cNvSpPr txBox="1"/>
+          <p:nvPr/>
+        </p:nvSpPr>
+        <p:spPr>
+          <a:xfrm>
+            <a:off x="8321040" y="2148840"/>
+            <a:ext cx="3063240" cy="3657600"/>
           </a:xfrm>
           <a:prstGeom prst="rect">
             <a:avLst/>
@@ -6241,7 +6793,7 @@
                 <a:ea typeface="Arial" pitchFamily="34" charset="-122"/>
                 <a:cs typeface="Arial" pitchFamily="34" charset="-120"/>
               </a:rPr>
-              <a:t>03 · Comunicação fragmentada</a:t>
+              <a:t>03. Comunicação fragmentada</a:t>
             </a:r>
             <a:endParaRPr lang="en-US" sz="2400" dirty="0"/>
           </a:p>
@@ -6278,7 +6830,7 @@
     <p:bg>
       <p:bgPr>
         <a:solidFill>
-          <a:srgbClr val="FFFFFF"/>
+          <a:srgbClr val="F4F7FB"/>
         </a:solidFill>
         <a:effectLst/>
       </p:bgPr>
@@ -6297,9 +6849,66 @@
           <a:chExt cx="0" cy="0"/>
         </a:xfrm>
       </p:grpSpPr>
-      <p:sp>
-        <p:nvSpPr>
-          <p:cNvPr id="2" name="Text 0"/>
+      <p:pic>
+        <p:nvPicPr>
+          <p:cNvPr id="10" name="Imagem 9">
+            <a:extLst>
+              <a:ext uri="{FF2B5EF4-FFF2-40B4-BE49-F238E27FC236}">
+                <a16:creationId xmlns:a16="http://schemas.microsoft.com/office/drawing/2014/main" id="{9A274BA7-188F-8D76-B0F4-918E2D4C4B70}"/>
+              </a:ext>
+            </a:extLst>
+          </p:cNvPr>
+          <p:cNvPicPr>
+            <a:picLocks noChangeAspect="1"/>
+          </p:cNvPicPr>
+          <p:nvPr/>
+        </p:nvPicPr>
+        <p:blipFill>
+          <a:blip r:embed="rId3">
+            <a:alphaModFix amt="20000"/>
+          </a:blip>
+          <a:stretch>
+            <a:fillRect/>
+          </a:stretch>
+        </p:blipFill>
+        <p:spPr>
+          <a:xfrm>
+            <a:off x="0" y="0"/>
+            <a:ext cx="12192000" cy="6858000"/>
+          </a:xfrm>
+          <a:prstGeom prst="rect">
+            <a:avLst/>
+          </a:prstGeom>
+        </p:spPr>
+      </p:pic>
+      <p:sp>
+        <p:nvSpPr>
+          <p:cNvPr id="2" name="Shape 0"/>
+          <p:cNvSpPr/>
+          <p:nvPr/>
+        </p:nvSpPr>
+        <p:spPr>
+          <a:xfrm>
+            <a:off x="0" y="0"/>
+            <a:ext cx="12191695" cy="1444752"/>
+          </a:xfrm>
+          <a:prstGeom prst="rect">
+            <a:avLst/>
+          </a:prstGeom>
+          <a:solidFill>
+            <a:srgbClr val="14202E"/>
+          </a:solidFill>
+          <a:ln w="12700">
+            <a:solidFill>
+              <a:srgbClr val="14202E"/>
+            </a:solidFill>
+            <a:prstDash val="solid"/>
+          </a:ln>
+        </p:spPr>
+      </p:sp>
+      <p:sp>
+        <p:nvSpPr>
+          <p:cNvPr id="3" name="Text 1"/>
           <p:cNvSpPr txBox="1"/>
           <p:nvPr/>
         </p:nvSpPr>
@@ -6324,21 +6933,21 @@
             <a:r>
               <a:rPr lang="en-US" sz="2400" b="1" dirty="0">
                 <a:solidFill>
-                  <a:srgbClr val="C4620A"/>
-                </a:solidFill>
-                <a:latin typeface="Arial" pitchFamily="34" charset="0"/>
-                <a:ea typeface="Arial" pitchFamily="34" charset="-122"/>
-                <a:cs typeface="Arial" pitchFamily="34" charset="-120"/>
-              </a:rPr>
-              <a:t>INTRODUÇÃO · OBJETIVO</a:t>
-            </a:r>
-            <a:endParaRPr lang="en-US" sz="2400" dirty="0"/>
-          </a:p>
-        </p:txBody>
-      </p:sp>
-      <p:sp>
-        <p:nvSpPr>
-          <p:cNvPr id="3" name="Text 1"/>
+                  <a:srgbClr val="6FD3D0"/>
+                </a:solidFill>
+                <a:latin typeface="Arial" pitchFamily="34" charset="0"/>
+                <a:ea typeface="Arial" pitchFamily="34" charset="-122"/>
+                <a:cs typeface="Arial" pitchFamily="34" charset="-120"/>
+              </a:rPr>
+              <a:t>INTRODUÇÃO: OBJETIVO</a:t>
+            </a:r>
+            <a:endParaRPr lang="en-US" sz="2400" dirty="0"/>
+          </a:p>
+        </p:txBody>
+      </p:sp>
+      <p:sp>
+        <p:nvSpPr>
+          <p:cNvPr id="4" name="Text 2"/>
           <p:cNvSpPr txBox="1"/>
           <p:nvPr/>
         </p:nvSpPr>
@@ -6363,7 +6972,7 @@
             <a:r>
               <a:rPr lang="en-US" sz="3200" b="1" dirty="0">
                 <a:solidFill>
-                  <a:srgbClr val="14202E"/>
+                  <a:srgbClr val="FFFFFF"/>
                 </a:solidFill>
                 <a:latin typeface="Arial" pitchFamily="34" charset="0"/>
                 <a:ea typeface="Arial" pitchFamily="34" charset="-122"/>
@@ -6377,7 +6986,7 @@
       </p:sp>
       <p:sp>
         <p:nvSpPr>
-          <p:cNvPr id="4" name="Text 2"/>
+          <p:cNvPr id="5" name="Text 3"/>
           <p:cNvSpPr txBox="1"/>
           <p:nvPr/>
         </p:nvSpPr>
@@ -6416,7 +7025,7 @@
       </p:sp>
       <p:sp>
         <p:nvSpPr>
-          <p:cNvPr id="6" name="Text 3"/>
+          <p:cNvPr id="7" name="Text 4"/>
           <p:cNvSpPr txBox="1"/>
           <p:nvPr/>
         </p:nvSpPr>
@@ -6455,7 +7064,7 @@
       </p:sp>
       <p:sp>
         <p:nvSpPr>
-          <p:cNvPr id="7" name="Shape 4"/>
+          <p:cNvPr id="8" name="Shape 5"/>
           <p:cNvSpPr/>
           <p:nvPr/>
         </p:nvSpPr>
@@ -6470,7 +7079,7 @@
             </a:avLst>
           </a:prstGeom>
           <a:solidFill>
-            <a:srgbClr val="F4F7FB"/>
+            <a:srgbClr val="FFFFFF"/>
           </a:solidFill>
           <a:ln w="12700">
             <a:solidFill>
@@ -6482,7 +7091,7 @@
       </p:sp>
       <p:sp>
         <p:nvSpPr>
-          <p:cNvPr id="8" name="Text 5"/>
+          <p:cNvPr id="9" name="Text 6"/>
           <p:cNvSpPr txBox="1"/>
           <p:nvPr/>
         </p:nvSpPr>
@@ -6504,6 +7113,28 @@
             <a:pPr marL="0" indent="0">
               <a:buNone/>
             </a:pPr>
+            <a:r>
+              <a:rPr lang="en-US" sz="2400" dirty="0" err="1">
+                <a:solidFill>
+                  <a:srgbClr val="14202E"/>
+                </a:solidFill>
+                <a:latin typeface="Arial" pitchFamily="34" charset="0"/>
+                <a:ea typeface="Arial" pitchFamily="34" charset="-122"/>
+                <a:cs typeface="Arial" pitchFamily="34" charset="-120"/>
+              </a:rPr>
+              <a:t>Validada</a:t>
+            </a:r>
+            <a:r>
+              <a:rPr lang="en-US" sz="2400" dirty="0">
+                <a:solidFill>
+                  <a:srgbClr val="14202E"/>
+                </a:solidFill>
+                <a:latin typeface="Arial" pitchFamily="34" charset="0"/>
+                <a:ea typeface="Arial" pitchFamily="34" charset="-122"/>
+                <a:cs typeface="Arial" pitchFamily="34" charset="-120"/>
+              </a:rPr>
+              <a:t> por requisitos, testes automatizados e roteiro funcional com perfis demonstrativos.</a:t>
+            </a:r>
             <a:endParaRPr lang="en-US" sz="2400" dirty="0"/>
           </a:p>
         </p:txBody>
@@ -6522,7 +7153,7 @@
     <p:bg>
       <p:bgPr>
         <a:solidFill>
-          <a:srgbClr val="FFFFFF"/>
+          <a:srgbClr val="F4F7FB"/>
         </a:solidFill>
         <a:effectLst/>
       </p:bgPr>
@@ -6541,9 +7172,66 @@
           <a:chExt cx="0" cy="0"/>
         </a:xfrm>
       </p:grpSpPr>
-      <p:sp>
-        <p:nvSpPr>
-          <p:cNvPr id="2" name="Text 0"/>
+      <p:pic>
+        <p:nvPicPr>
+          <p:cNvPr id="22" name="Imagem 21">
+            <a:extLst>
+              <a:ext uri="{FF2B5EF4-FFF2-40B4-BE49-F238E27FC236}">
+                <a16:creationId xmlns:a16="http://schemas.microsoft.com/office/drawing/2014/main" id="{3D90C3C2-09DA-0298-F1D5-F732580E8D0A}"/>
+              </a:ext>
+            </a:extLst>
+          </p:cNvPr>
+          <p:cNvPicPr>
+            <a:picLocks noChangeAspect="1"/>
+          </p:cNvPicPr>
+          <p:nvPr/>
+        </p:nvPicPr>
+        <p:blipFill>
+          <a:blip r:embed="rId3">
+            <a:alphaModFix amt="20000"/>
+          </a:blip>
+          <a:stretch>
+            <a:fillRect/>
+          </a:stretch>
+        </p:blipFill>
+        <p:spPr>
+          <a:xfrm>
+            <a:off x="0" y="17252"/>
+            <a:ext cx="12192000" cy="6858000"/>
+          </a:xfrm>
+          <a:prstGeom prst="rect">
+            <a:avLst/>
+          </a:prstGeom>
+        </p:spPr>
+      </p:pic>
+      <p:sp>
+        <p:nvSpPr>
+          <p:cNvPr id="2" name="Shape 0"/>
+          <p:cNvSpPr/>
+          <p:nvPr/>
+        </p:nvSpPr>
+        <p:spPr>
+          <a:xfrm>
+            <a:off x="0" y="0"/>
+            <a:ext cx="12191695" cy="1444752"/>
+          </a:xfrm>
+          <a:prstGeom prst="rect">
+            <a:avLst/>
+          </a:prstGeom>
+          <a:solidFill>
+            <a:srgbClr val="14202E"/>
+          </a:solidFill>
+          <a:ln w="12700">
+            <a:solidFill>
+              <a:srgbClr val="14202E"/>
+            </a:solidFill>
+            <a:prstDash val="solid"/>
+          </a:ln>
+        </p:spPr>
+      </p:sp>
+      <p:sp>
+        <p:nvSpPr>
+          <p:cNvPr id="3" name="Text 1"/>
           <p:cNvSpPr txBox="1"/>
           <p:nvPr/>
         </p:nvSpPr>
@@ -6568,7 +7256,7 @@
             <a:r>
               <a:rPr lang="en-US" sz="2400" b="1" dirty="0">
                 <a:solidFill>
-                  <a:srgbClr val="C4620A"/>
+                  <a:srgbClr val="6FD3D0"/>
                 </a:solidFill>
                 <a:latin typeface="Arial" pitchFamily="34" charset="0"/>
                 <a:ea typeface="Arial" pitchFamily="34" charset="-122"/>
@@ -6582,7 +7270,7 @@
       </p:sp>
       <p:sp>
         <p:nvSpPr>
-          <p:cNvPr id="3" name="Text 1"/>
+          <p:cNvPr id="4" name="Text 2"/>
           <p:cNvSpPr txBox="1"/>
           <p:nvPr/>
         </p:nvSpPr>
@@ -6607,7 +7295,7 @@
             <a:r>
               <a:rPr lang="en-US" sz="3200" b="1" dirty="0">
                 <a:solidFill>
-                  <a:srgbClr val="14202E"/>
+                  <a:srgbClr val="FFFFFF"/>
                 </a:solidFill>
                 <a:latin typeface="Arial" pitchFamily="34" charset="0"/>
                 <a:ea typeface="Arial" pitchFamily="34" charset="-122"/>
@@ -6621,7 +7309,7 @@
       </p:sp>
       <p:sp>
         <p:nvSpPr>
-          <p:cNvPr id="4" name="Text 2"/>
+          <p:cNvPr id="5" name="Text 3"/>
           <p:cNvSpPr txBox="1"/>
           <p:nvPr/>
         </p:nvSpPr>
@@ -6660,7 +7348,7 @@
       </p:sp>
       <p:sp>
         <p:nvSpPr>
-          <p:cNvPr id="6" name="Shape 3"/>
+          <p:cNvPr id="7" name="Shape 4"/>
           <p:cNvSpPr/>
           <p:nvPr/>
         </p:nvSpPr>
@@ -6685,7 +7373,7 @@
       </p:sp>
       <p:sp>
         <p:nvSpPr>
-          <p:cNvPr id="7" name="Text 4"/>
+          <p:cNvPr id="8" name="Text 5"/>
           <p:cNvSpPr txBox="1"/>
           <p:nvPr/>
         </p:nvSpPr>
@@ -6724,7 +7412,7 @@
       </p:sp>
       <p:sp>
         <p:nvSpPr>
-          <p:cNvPr id="8" name="Text 5"/>
+          <p:cNvPr id="9" name="Text 6"/>
           <p:cNvSpPr txBox="1"/>
           <p:nvPr/>
         </p:nvSpPr>
@@ -6780,7 +7468,7 @@
       </p:sp>
       <p:sp>
         <p:nvSpPr>
-          <p:cNvPr id="9" name="Shape 6"/>
+          <p:cNvPr id="10" name="Shape 7"/>
           <p:cNvSpPr/>
           <p:nvPr/>
         </p:nvSpPr>
@@ -6805,7 +7493,7 @@
       </p:sp>
       <p:sp>
         <p:nvSpPr>
-          <p:cNvPr id="10" name="Text 7"/>
+          <p:cNvPr id="11" name="Text 8"/>
           <p:cNvSpPr txBox="1"/>
           <p:nvPr/>
         </p:nvSpPr>
@@ -6844,7 +7532,7 @@
       </p:sp>
       <p:sp>
         <p:nvSpPr>
-          <p:cNvPr id="11" name="Text 8"/>
+          <p:cNvPr id="12" name="Text 9"/>
           <p:cNvSpPr txBox="1"/>
           <p:nvPr/>
         </p:nvSpPr>
@@ -6900,7 +7588,7 @@
       </p:sp>
       <p:sp>
         <p:nvSpPr>
-          <p:cNvPr id="12" name="Shape 9"/>
+          <p:cNvPr id="13" name="Shape 10"/>
           <p:cNvSpPr/>
           <p:nvPr/>
         </p:nvSpPr>
@@ -6925,7 +7613,7 @@
       </p:sp>
       <p:sp>
         <p:nvSpPr>
-          <p:cNvPr id="13" name="Text 10"/>
+          <p:cNvPr id="14" name="Text 11"/>
           <p:cNvSpPr txBox="1"/>
           <p:nvPr/>
         </p:nvSpPr>
@@ -6964,7 +7652,7 @@
       </p:sp>
       <p:sp>
         <p:nvSpPr>
-          <p:cNvPr id="14" name="Text 11"/>
+          <p:cNvPr id="15" name="Text 12"/>
           <p:cNvSpPr txBox="1"/>
           <p:nvPr/>
         </p:nvSpPr>
@@ -7020,7 +7708,7 @@
       </p:sp>
       <p:sp>
         <p:nvSpPr>
-          <p:cNvPr id="15" name="Shape 12"/>
+          <p:cNvPr id="16" name="Shape 13"/>
           <p:cNvSpPr/>
           <p:nvPr/>
         </p:nvSpPr>
@@ -7045,7 +7733,7 @@
       </p:sp>
       <p:sp>
         <p:nvSpPr>
-          <p:cNvPr id="16" name="Text 13"/>
+          <p:cNvPr id="17" name="Text 14"/>
           <p:cNvSpPr txBox="1"/>
           <p:nvPr/>
         </p:nvSpPr>
@@ -7084,7 +7772,7 @@
       </p:sp>
       <p:sp>
         <p:nvSpPr>
-          <p:cNvPr id="17" name="Text 14"/>
+          <p:cNvPr id="18" name="Text 15"/>
           <p:cNvSpPr txBox="1"/>
           <p:nvPr/>
         </p:nvSpPr>
@@ -7140,7 +7828,7 @@
       </p:sp>
       <p:sp>
         <p:nvSpPr>
-          <p:cNvPr id="18" name="Shape 15"/>
+          <p:cNvPr id="19" name="Shape 16"/>
           <p:cNvSpPr/>
           <p:nvPr/>
         </p:nvSpPr>
@@ -7165,7 +7853,7 @@
       </p:sp>
       <p:sp>
         <p:nvSpPr>
-          <p:cNvPr id="19" name="Text 16"/>
+          <p:cNvPr id="20" name="Text 17"/>
           <p:cNvSpPr txBox="1"/>
           <p:nvPr/>
         </p:nvSpPr>
@@ -7204,7 +7892,7 @@
       </p:sp>
       <p:sp>
         <p:nvSpPr>
-          <p:cNvPr id="20" name="Text 17"/>
+          <p:cNvPr id="21" name="Text 18"/>
           <p:cNvSpPr txBox="1"/>
           <p:nvPr/>
         </p:nvSpPr>
@@ -7272,7 +7960,7 @@
     <p:bg>
       <p:bgPr>
         <a:solidFill>
-          <a:srgbClr val="FFFFFF"/>
+          <a:srgbClr val="F4F7FB"/>
         </a:solidFill>
         <a:effectLst/>
       </p:bgPr>
@@ -7291,9 +7979,66 @@
           <a:chExt cx="0" cy="0"/>
         </a:xfrm>
       </p:grpSpPr>
-      <p:sp>
-        <p:nvSpPr>
-          <p:cNvPr id="2" name="Text 0"/>
+      <p:pic>
+        <p:nvPicPr>
+          <p:cNvPr id="22" name="Imagem 21">
+            <a:extLst>
+              <a:ext uri="{FF2B5EF4-FFF2-40B4-BE49-F238E27FC236}">
+                <a16:creationId xmlns:a16="http://schemas.microsoft.com/office/drawing/2014/main" id="{472543B1-59FC-4B39-0EEA-39603C0DD22F}"/>
+              </a:ext>
+            </a:extLst>
+          </p:cNvPr>
+          <p:cNvPicPr>
+            <a:picLocks noChangeAspect="1"/>
+          </p:cNvPicPr>
+          <p:nvPr/>
+        </p:nvPicPr>
+        <p:blipFill>
+          <a:blip r:embed="rId3">
+            <a:alphaModFix amt="20000"/>
+          </a:blip>
+          <a:stretch>
+            <a:fillRect/>
+          </a:stretch>
+        </p:blipFill>
+        <p:spPr>
+          <a:xfrm>
+            <a:off x="0" y="0"/>
+            <a:ext cx="12192000" cy="6858000"/>
+          </a:xfrm>
+          <a:prstGeom prst="rect">
+            <a:avLst/>
+          </a:prstGeom>
+        </p:spPr>
+      </p:pic>
+      <p:sp>
+        <p:nvSpPr>
+          <p:cNvPr id="2" name="Shape 0"/>
+          <p:cNvSpPr/>
+          <p:nvPr/>
+        </p:nvSpPr>
+        <p:spPr>
+          <a:xfrm>
+            <a:off x="0" y="0"/>
+            <a:ext cx="12191695" cy="1444752"/>
+          </a:xfrm>
+          <a:prstGeom prst="rect">
+            <a:avLst/>
+          </a:prstGeom>
+          <a:solidFill>
+            <a:srgbClr val="14202E"/>
+          </a:solidFill>
+          <a:ln w="12700">
+            <a:solidFill>
+              <a:srgbClr val="14202E"/>
+            </a:solidFill>
+            <a:prstDash val="solid"/>
+          </a:ln>
+        </p:spPr>
+      </p:sp>
+      <p:sp>
+        <p:nvSpPr>
+          <p:cNvPr id="3" name="Text 1"/>
           <p:cNvSpPr txBox="1"/>
           <p:nvPr/>
         </p:nvSpPr>
@@ -7318,7 +8063,7 @@
             <a:r>
               <a:rPr lang="en-US" sz="2400" b="1" dirty="0">
                 <a:solidFill>
-                  <a:srgbClr val="C4620A"/>
+                  <a:srgbClr val="6FD3D0"/>
                 </a:solidFill>
                 <a:latin typeface="Arial" pitchFamily="34" charset="0"/>
                 <a:ea typeface="Arial" pitchFamily="34" charset="-122"/>
@@ -7332,7 +8077,7 @@
       </p:sp>
       <p:sp>
         <p:nvSpPr>
-          <p:cNvPr id="3" name="Text 1"/>
+          <p:cNvPr id="4" name="Text 2"/>
           <p:cNvSpPr txBox="1"/>
           <p:nvPr/>
         </p:nvSpPr>
@@ -7357,7 +8102,7 @@
             <a:r>
               <a:rPr lang="en-US" sz="3200" b="1" dirty="0">
                 <a:solidFill>
-                  <a:srgbClr val="14202E"/>
+                  <a:srgbClr val="FFFFFF"/>
                 </a:solidFill>
                 <a:latin typeface="Arial" pitchFamily="34" charset="0"/>
                 <a:ea typeface="Arial" pitchFamily="34" charset="-122"/>
@@ -7371,7 +8116,7 @@
       </p:sp>
       <p:sp>
         <p:nvSpPr>
-          <p:cNvPr id="4" name="Text 2"/>
+          <p:cNvPr id="5" name="Text 3"/>
           <p:cNvSpPr txBox="1"/>
           <p:nvPr/>
         </p:nvSpPr>
@@ -7410,7 +8155,7 @@
       </p:sp>
       <p:sp>
         <p:nvSpPr>
-          <p:cNvPr id="6" name="Shape 3"/>
+          <p:cNvPr id="7" name="Shape 4"/>
           <p:cNvSpPr/>
           <p:nvPr/>
         </p:nvSpPr>
@@ -7435,7 +8180,7 @@
       </p:sp>
       <p:sp>
         <p:nvSpPr>
-          <p:cNvPr id="7" name="Text 4"/>
+          <p:cNvPr id="8" name="Text 5"/>
           <p:cNvSpPr txBox="1"/>
           <p:nvPr/>
         </p:nvSpPr>
@@ -7474,7 +8219,7 @@
       </p:sp>
       <p:sp>
         <p:nvSpPr>
-          <p:cNvPr id="8" name="Text 5"/>
+          <p:cNvPr id="9" name="Text 6"/>
           <p:cNvSpPr txBox="1"/>
           <p:nvPr/>
         </p:nvSpPr>
@@ -7530,7 +8275,7 @@
       </p:sp>
       <p:sp>
         <p:nvSpPr>
-          <p:cNvPr id="9" name="Shape 6"/>
+          <p:cNvPr id="10" name="Shape 7"/>
           <p:cNvSpPr/>
           <p:nvPr/>
         </p:nvSpPr>
@@ -7555,7 +8300,7 @@
       </p:sp>
       <p:sp>
         <p:nvSpPr>
-          <p:cNvPr id="10" name="Text 7"/>
+          <p:cNvPr id="11" name="Text 8"/>
           <p:cNvSpPr txBox="1"/>
           <p:nvPr/>
         </p:nvSpPr>
@@ -7594,7 +8339,7 @@
       </p:sp>
       <p:sp>
         <p:nvSpPr>
-          <p:cNvPr id="11" name="Text 8"/>
+          <p:cNvPr id="12" name="Text 9"/>
           <p:cNvSpPr txBox="1"/>
           <p:nvPr/>
         </p:nvSpPr>
@@ -7625,7 +8370,7 @@
                 <a:ea typeface="Arial" pitchFamily="34" charset="-122"/>
                 <a:cs typeface="Arial" pitchFamily="34" charset="-120"/>
               </a:rPr>
-              <a:t>Vínculo aluno–responsável</a:t>
+              <a:t>Vínculo entre aluno e responsável</a:t>
             </a:r>
             <a:endParaRPr lang="en-US" sz="2400" dirty="0"/>
           </a:p>
@@ -7650,7 +8395,7 @@
       </p:sp>
       <p:sp>
         <p:nvSpPr>
-          <p:cNvPr id="12" name="Shape 9"/>
+          <p:cNvPr id="13" name="Shape 10"/>
           <p:cNvSpPr/>
           <p:nvPr/>
         </p:nvSpPr>
@@ -7675,7 +8420,7 @@
       </p:sp>
       <p:sp>
         <p:nvSpPr>
-          <p:cNvPr id="13" name="Text 10"/>
+          <p:cNvPr id="14" name="Text 11"/>
           <p:cNvSpPr txBox="1"/>
           <p:nvPr/>
         </p:nvSpPr>
@@ -7714,7 +8459,7 @@
       </p:sp>
       <p:sp>
         <p:nvSpPr>
-          <p:cNvPr id="14" name="Text 11"/>
+          <p:cNvPr id="15" name="Text 12"/>
           <p:cNvSpPr txBox="1"/>
           <p:nvPr/>
         </p:nvSpPr>
@@ -7770,7 +8515,7 @@
       </p:sp>
       <p:sp>
         <p:nvSpPr>
-          <p:cNvPr id="15" name="Shape 12"/>
+          <p:cNvPr id="16" name="Shape 13"/>
           <p:cNvSpPr/>
           <p:nvPr/>
         </p:nvSpPr>
@@ -7795,7 +8540,7 @@
       </p:sp>
       <p:sp>
         <p:nvSpPr>
-          <p:cNvPr id="16" name="Text 13"/>
+          <p:cNvPr id="17" name="Text 14"/>
           <p:cNvSpPr txBox="1"/>
           <p:nvPr/>
         </p:nvSpPr>
@@ -7834,7 +8579,7 @@
       </p:sp>
       <p:sp>
         <p:nvSpPr>
-          <p:cNvPr id="17" name="Text 14"/>
+          <p:cNvPr id="18" name="Text 15"/>
           <p:cNvSpPr txBox="1"/>
           <p:nvPr/>
         </p:nvSpPr>
@@ -7890,7 +8635,7 @@
       </p:sp>
       <p:sp>
         <p:nvSpPr>
-          <p:cNvPr id="18" name="Shape 15"/>
+          <p:cNvPr id="19" name="Shape 16"/>
           <p:cNvSpPr/>
           <p:nvPr/>
         </p:nvSpPr>
@@ -7915,7 +8660,7 @@
       </p:sp>
       <p:sp>
         <p:nvSpPr>
-          <p:cNvPr id="19" name="Text 16"/>
+          <p:cNvPr id="20" name="Text 17"/>
           <p:cNvSpPr txBox="1"/>
           <p:nvPr/>
         </p:nvSpPr>
@@ -7954,7 +8699,7 @@
       </p:sp>
       <p:sp>
         <p:nvSpPr>
-          <p:cNvPr id="20" name="Text 17"/>
+          <p:cNvPr id="21" name="Text 18"/>
           <p:cNvSpPr txBox="1"/>
           <p:nvPr/>
         </p:nvSpPr>
@@ -8022,7 +8767,7 @@
     <p:bg>
       <p:bgPr>
         <a:solidFill>
-          <a:srgbClr val="FFFFFF"/>
+          <a:srgbClr val="F4F7FB"/>
         </a:solidFill>
         <a:effectLst/>
       </p:bgPr>
@@ -8041,16 +8786,73 @@
           <a:chExt cx="0" cy="0"/>
         </a:xfrm>
       </p:grpSpPr>
-      <p:sp>
-        <p:nvSpPr>
-          <p:cNvPr id="2" name="Text 0"/>
+      <p:pic>
+        <p:nvPicPr>
+          <p:cNvPr id="9" name="Imagem 8">
+            <a:extLst>
+              <a:ext uri="{FF2B5EF4-FFF2-40B4-BE49-F238E27FC236}">
+                <a16:creationId xmlns:a16="http://schemas.microsoft.com/office/drawing/2014/main" id="{3BCE9AB6-9040-F20B-5422-79A304C7B5D3}"/>
+              </a:ext>
+            </a:extLst>
+          </p:cNvPr>
+          <p:cNvPicPr>
+            <a:picLocks noChangeAspect="1"/>
+          </p:cNvPicPr>
+          <p:nvPr/>
+        </p:nvPicPr>
+        <p:blipFill>
+          <a:blip r:embed="rId3">
+            <a:alphaModFix amt="5000"/>
+          </a:blip>
+          <a:stretch>
+            <a:fillRect/>
+          </a:stretch>
+        </p:blipFill>
+        <p:spPr>
+          <a:xfrm>
+            <a:off x="0" y="0"/>
+            <a:ext cx="12192000" cy="6858000"/>
+          </a:xfrm>
+          <a:prstGeom prst="rect">
+            <a:avLst/>
+          </a:prstGeom>
+        </p:spPr>
+      </p:pic>
+      <p:sp>
+        <p:nvSpPr>
+          <p:cNvPr id="2" name="Shape 0"/>
+          <p:cNvSpPr/>
+          <p:nvPr/>
+        </p:nvSpPr>
+        <p:spPr>
+          <a:xfrm>
+            <a:off x="0" y="0"/>
+            <a:ext cx="12191695" cy="1444752"/>
+          </a:xfrm>
+          <a:prstGeom prst="rect">
+            <a:avLst/>
+          </a:prstGeom>
+          <a:solidFill>
+            <a:srgbClr val="14202E"/>
+          </a:solidFill>
+          <a:ln w="12700">
+            <a:solidFill>
+              <a:srgbClr val="14202E"/>
+            </a:solidFill>
+            <a:prstDash val="solid"/>
+          </a:ln>
+        </p:spPr>
+      </p:sp>
+      <p:sp>
+        <p:nvSpPr>
+          <p:cNvPr id="3" name="Text 1"/>
           <p:cNvSpPr txBox="1"/>
           <p:nvPr/>
         </p:nvSpPr>
         <p:spPr>
           <a:xfrm>
             <a:off x="548640" y="274320"/>
-            <a:ext cx="5486400" cy="365760"/>
+            <a:ext cx="11064240" cy="365760"/>
           </a:xfrm>
           <a:prstGeom prst="rect">
             <a:avLst/>
@@ -8068,28 +8870,28 @@
             <a:r>
               <a:rPr lang="en-US" sz="2400" b="1" dirty="0">
                 <a:solidFill>
-                  <a:srgbClr val="C4620A"/>
-                </a:solidFill>
-                <a:latin typeface="Arial" pitchFamily="34" charset="0"/>
-                <a:ea typeface="Arial" pitchFamily="34" charset="-122"/>
-                <a:cs typeface="Arial" pitchFamily="34" charset="-120"/>
-              </a:rPr>
-              <a:t>MVP · ACESSO</a:t>
-            </a:r>
-            <a:endParaRPr lang="en-US" sz="2400" dirty="0"/>
-          </a:p>
-        </p:txBody>
-      </p:sp>
-      <p:sp>
-        <p:nvSpPr>
-          <p:cNvPr id="3" name="Text 1"/>
+                  <a:srgbClr val="6FD3D0"/>
+                </a:solidFill>
+                <a:latin typeface="Arial" pitchFamily="34" charset="0"/>
+                <a:ea typeface="Arial" pitchFamily="34" charset="-122"/>
+                <a:cs typeface="Arial" pitchFamily="34" charset="-120"/>
+              </a:rPr>
+              <a:t>MVP: ACESSO</a:t>
+            </a:r>
+            <a:endParaRPr lang="en-US" sz="2400" dirty="0"/>
+          </a:p>
+        </p:txBody>
+      </p:sp>
+      <p:sp>
+        <p:nvSpPr>
+          <p:cNvPr id="4" name="Text 2"/>
           <p:cNvSpPr txBox="1"/>
           <p:nvPr/>
         </p:nvSpPr>
         <p:spPr>
           <a:xfrm>
             <a:off x="548640" y="713232"/>
-            <a:ext cx="5486400" cy="1463040"/>
+            <a:ext cx="11064240" cy="640080"/>
           </a:xfrm>
           <a:prstGeom prst="rect">
             <a:avLst/>
@@ -8107,7 +8909,7 @@
             <a:r>
               <a:rPr lang="en-US" sz="3200" b="1" dirty="0">
                 <a:solidFill>
-                  <a:srgbClr val="14202E"/>
+                  <a:srgbClr val="FFFFFF"/>
                 </a:solidFill>
                 <a:latin typeface="Arial" pitchFamily="34" charset="0"/>
                 <a:ea typeface="Arial" pitchFamily="34" charset="-122"/>
@@ -8121,7 +8923,7 @@
       </p:sp>
       <p:sp>
         <p:nvSpPr>
-          <p:cNvPr id="4" name="Text 2"/>
+          <p:cNvPr id="5" name="Text 3"/>
           <p:cNvSpPr txBox="1"/>
           <p:nvPr/>
         </p:nvSpPr>
@@ -8160,14 +8962,14 @@
       </p:sp>
       <p:sp>
         <p:nvSpPr>
-          <p:cNvPr id="6" name="Text 3"/>
-          <p:cNvSpPr txBox="1"/>
-          <p:nvPr/>
-        </p:nvSpPr>
-        <p:spPr>
-          <a:xfrm>
-            <a:off x="548640" y="2468880"/>
-            <a:ext cx="5486400" cy="3566160"/>
+          <p:cNvPr id="7" name="Text 4"/>
+          <p:cNvSpPr txBox="1"/>
+          <p:nvPr/>
+        </p:nvSpPr>
+        <p:spPr>
+          <a:xfrm>
+            <a:off x="548640" y="2377440"/>
+            <a:ext cx="5486400" cy="3657600"/>
           </a:xfrm>
           <a:prstGeom prst="rect">
             <a:avLst/>
@@ -8235,22 +9037,22 @@
       </p:sp>
       <p:pic>
         <p:nvPicPr>
-          <p:cNvPr id="7" name="Image 0" descr="/home/claude/u/ppt/media/image1.jpeg"/>
+          <p:cNvPr id="8" name="Image 0" descr="/home/claude/u/ppt/media/image1.jpeg"/>
           <p:cNvPicPr>
             <a:picLocks noChangeAspect="1"/>
           </p:cNvPicPr>
           <p:nvPr/>
         </p:nvPicPr>
         <p:blipFill>
-          <a:blip r:embed="rId3"/>
+          <a:blip r:embed="rId4"/>
           <a:stretch>
             <a:fillRect/>
           </a:stretch>
         </p:blipFill>
         <p:spPr>
           <a:xfrm>
-            <a:off x="6309360" y="2613624"/>
-            <a:ext cx="5349240" cy="2636592"/>
+            <a:off x="5667555" y="1444751"/>
+            <a:ext cx="6524139" cy="4438463"/>
           </a:xfrm>
           <a:prstGeom prst="rect">
             <a:avLst/>
@@ -8271,7 +9073,7 @@
     <p:bg>
       <p:bgPr>
         <a:solidFill>
-          <a:srgbClr val="FFFFFF"/>
+          <a:srgbClr val="F4F7FB"/>
         </a:solidFill>
         <a:effectLst/>
       </p:bgPr>
@@ -8290,16 +9092,73 @@
           <a:chExt cx="0" cy="0"/>
         </a:xfrm>
       </p:grpSpPr>
-      <p:sp>
-        <p:nvSpPr>
-          <p:cNvPr id="2" name="Text 0"/>
+      <p:pic>
+        <p:nvPicPr>
+          <p:cNvPr id="9" name="Imagem 8">
+            <a:extLst>
+              <a:ext uri="{FF2B5EF4-FFF2-40B4-BE49-F238E27FC236}">
+                <a16:creationId xmlns:a16="http://schemas.microsoft.com/office/drawing/2014/main" id="{BDA77D65-3B02-AEC9-BE77-3599186405C6}"/>
+              </a:ext>
+            </a:extLst>
+          </p:cNvPr>
+          <p:cNvPicPr>
+            <a:picLocks noChangeAspect="1"/>
+          </p:cNvPicPr>
+          <p:nvPr/>
+        </p:nvPicPr>
+        <p:blipFill>
+          <a:blip r:embed="rId3">
+            <a:alphaModFix amt="5000"/>
+          </a:blip>
+          <a:stretch>
+            <a:fillRect/>
+          </a:stretch>
+        </p:blipFill>
+        <p:spPr>
+          <a:xfrm>
+            <a:off x="0" y="0"/>
+            <a:ext cx="12192000" cy="6858000"/>
+          </a:xfrm>
+          <a:prstGeom prst="rect">
+            <a:avLst/>
+          </a:prstGeom>
+        </p:spPr>
+      </p:pic>
+      <p:sp>
+        <p:nvSpPr>
+          <p:cNvPr id="2" name="Shape 0"/>
+          <p:cNvSpPr/>
+          <p:nvPr/>
+        </p:nvSpPr>
+        <p:spPr>
+          <a:xfrm>
+            <a:off x="0" y="0"/>
+            <a:ext cx="12191695" cy="1444752"/>
+          </a:xfrm>
+          <a:prstGeom prst="rect">
+            <a:avLst/>
+          </a:prstGeom>
+          <a:solidFill>
+            <a:srgbClr val="14202E"/>
+          </a:solidFill>
+          <a:ln w="12700">
+            <a:solidFill>
+              <a:srgbClr val="14202E"/>
+            </a:solidFill>
+            <a:prstDash val="solid"/>
+          </a:ln>
+        </p:spPr>
+      </p:sp>
+      <p:sp>
+        <p:nvSpPr>
+          <p:cNvPr id="3" name="Text 1"/>
           <p:cNvSpPr txBox="1"/>
           <p:nvPr/>
         </p:nvSpPr>
         <p:spPr>
           <a:xfrm>
             <a:off x="548640" y="274320"/>
-            <a:ext cx="5486400" cy="365760"/>
+            <a:ext cx="11064240" cy="365760"/>
           </a:xfrm>
           <a:prstGeom prst="rect">
             <a:avLst/>
@@ -8317,28 +9176,28 @@
             <a:r>
               <a:rPr lang="en-US" sz="2400" b="1" dirty="0">
                 <a:solidFill>
-                  <a:srgbClr val="C4620A"/>
-                </a:solidFill>
-                <a:latin typeface="Arial" pitchFamily="34" charset="0"/>
-                <a:ea typeface="Arial" pitchFamily="34" charset="-122"/>
-                <a:cs typeface="Arial" pitchFamily="34" charset="-120"/>
-              </a:rPr>
-              <a:t>MVP · PORTARIA</a:t>
-            </a:r>
-            <a:endParaRPr lang="en-US" sz="2400" dirty="0"/>
-          </a:p>
-        </p:txBody>
-      </p:sp>
-      <p:sp>
-        <p:nvSpPr>
-          <p:cNvPr id="3" name="Text 1"/>
+                  <a:srgbClr val="6FD3D0"/>
+                </a:solidFill>
+                <a:latin typeface="Arial" pitchFamily="34" charset="0"/>
+                <a:ea typeface="Arial" pitchFamily="34" charset="-122"/>
+                <a:cs typeface="Arial" pitchFamily="34" charset="-120"/>
+              </a:rPr>
+              <a:t>MVP: PORTARIA</a:t>
+            </a:r>
+            <a:endParaRPr lang="en-US" sz="2400" dirty="0"/>
+          </a:p>
+        </p:txBody>
+      </p:sp>
+      <p:sp>
+        <p:nvSpPr>
+          <p:cNvPr id="4" name="Text 2"/>
           <p:cNvSpPr txBox="1"/>
           <p:nvPr/>
         </p:nvSpPr>
         <p:spPr>
           <a:xfrm>
             <a:off x="548640" y="713232"/>
-            <a:ext cx="5486400" cy="1463040"/>
+            <a:ext cx="11064240" cy="640080"/>
           </a:xfrm>
           <a:prstGeom prst="rect">
             <a:avLst/>
@@ -8356,7 +9215,7 @@
             <a:r>
               <a:rPr lang="en-US" sz="3200" b="1" dirty="0">
                 <a:solidFill>
-                  <a:srgbClr val="14202E"/>
+                  <a:srgbClr val="FFFFFF"/>
                 </a:solidFill>
                 <a:latin typeface="Arial" pitchFamily="34" charset="0"/>
                 <a:ea typeface="Arial" pitchFamily="34" charset="-122"/>
@@ -8370,7 +9229,7 @@
       </p:sp>
       <p:sp>
         <p:nvSpPr>
-          <p:cNvPr id="4" name="Text 2"/>
+          <p:cNvPr id="5" name="Text 3"/>
           <p:cNvSpPr txBox="1"/>
           <p:nvPr/>
         </p:nvSpPr>
@@ -8409,14 +9268,14 @@
       </p:sp>
       <p:sp>
         <p:nvSpPr>
-          <p:cNvPr id="6" name="Text 3"/>
-          <p:cNvSpPr txBox="1"/>
-          <p:nvPr/>
-        </p:nvSpPr>
-        <p:spPr>
-          <a:xfrm>
-            <a:off x="548640" y="2468880"/>
-            <a:ext cx="5486400" cy="3566160"/>
+          <p:cNvPr id="7" name="Text 4"/>
+          <p:cNvSpPr txBox="1"/>
+          <p:nvPr/>
+        </p:nvSpPr>
+        <p:spPr>
+          <a:xfrm>
+            <a:off x="548640" y="2377440"/>
+            <a:ext cx="5486400" cy="3657600"/>
           </a:xfrm>
           <a:prstGeom prst="rect">
             <a:avLst/>
@@ -8465,7 +9324,7 @@
                 <a:ea typeface="Arial" pitchFamily="34" charset="-122"/>
                 <a:cs typeface="Arial" pitchFamily="34" charset="-120"/>
               </a:rPr>
-              <a:t>Sequência entrada → saída garantida</a:t>
+              <a:t>Sequência de entrada e saída garantida</a:t>
             </a:r>
             <a:endParaRPr lang="en-US" sz="2400" dirty="0"/>
           </a:p>
@@ -8494,22 +9353,22 @@
       </p:sp>
       <p:pic>
         <p:nvPicPr>
-          <p:cNvPr id="7" name="Image 0" descr="/home/claude/u/ppt/media/image2.jpeg"/>
+          <p:cNvPr id="8" name="Image 0" descr="/home/claude/u/ppt/media/image2.jpeg"/>
           <p:cNvPicPr>
             <a:picLocks noChangeAspect="1"/>
           </p:cNvPicPr>
           <p:nvPr/>
         </p:nvPicPr>
         <p:blipFill>
-          <a:blip r:embed="rId3"/>
+          <a:blip r:embed="rId4"/>
           <a:stretch>
             <a:fillRect/>
           </a:stretch>
         </p:blipFill>
         <p:spPr>
           <a:xfrm>
-            <a:off x="6309360" y="1922240"/>
-            <a:ext cx="5349240" cy="4019360"/>
+            <a:off x="5684809" y="1517904"/>
+            <a:ext cx="6506886" cy="4423696"/>
           </a:xfrm>
           <a:prstGeom prst="rect">
             <a:avLst/>
@@ -8530,7 +9389,7 @@
     <p:bg>
       <p:bgPr>
         <a:solidFill>
-          <a:srgbClr val="FFFFFF"/>
+          <a:srgbClr val="F4F7FB"/>
         </a:solidFill>
         <a:effectLst/>
       </p:bgPr>
@@ -8549,16 +9408,73 @@
           <a:chExt cx="0" cy="0"/>
         </a:xfrm>
       </p:grpSpPr>
-      <p:sp>
-        <p:nvSpPr>
-          <p:cNvPr id="2" name="Text 0"/>
+      <p:pic>
+        <p:nvPicPr>
+          <p:cNvPr id="9" name="Imagem 8">
+            <a:extLst>
+              <a:ext uri="{FF2B5EF4-FFF2-40B4-BE49-F238E27FC236}">
+                <a16:creationId xmlns:a16="http://schemas.microsoft.com/office/drawing/2014/main" id="{02779CE6-0310-43EE-2641-573DF9EC6B07}"/>
+              </a:ext>
+            </a:extLst>
+          </p:cNvPr>
+          <p:cNvPicPr>
+            <a:picLocks noChangeAspect="1"/>
+          </p:cNvPicPr>
+          <p:nvPr/>
+        </p:nvPicPr>
+        <p:blipFill>
+          <a:blip r:embed="rId3">
+            <a:alphaModFix amt="5000"/>
+          </a:blip>
+          <a:stretch>
+            <a:fillRect/>
+          </a:stretch>
+        </p:blipFill>
+        <p:spPr>
+          <a:xfrm>
+            <a:off x="0" y="0"/>
+            <a:ext cx="12192000" cy="6858000"/>
+          </a:xfrm>
+          <a:prstGeom prst="rect">
+            <a:avLst/>
+          </a:prstGeom>
+        </p:spPr>
+      </p:pic>
+      <p:sp>
+        <p:nvSpPr>
+          <p:cNvPr id="2" name="Shape 0"/>
+          <p:cNvSpPr/>
+          <p:nvPr/>
+        </p:nvSpPr>
+        <p:spPr>
+          <a:xfrm>
+            <a:off x="0" y="0"/>
+            <a:ext cx="12191695" cy="1444752"/>
+          </a:xfrm>
+          <a:prstGeom prst="rect">
+            <a:avLst/>
+          </a:prstGeom>
+          <a:solidFill>
+            <a:srgbClr val="14202E"/>
+          </a:solidFill>
+          <a:ln w="12700">
+            <a:solidFill>
+              <a:srgbClr val="14202E"/>
+            </a:solidFill>
+            <a:prstDash val="solid"/>
+          </a:ln>
+        </p:spPr>
+      </p:sp>
+      <p:sp>
+        <p:nvSpPr>
+          <p:cNvPr id="3" name="Text 1"/>
           <p:cNvSpPr txBox="1"/>
           <p:nvPr/>
         </p:nvSpPr>
         <p:spPr>
           <a:xfrm>
             <a:off x="548640" y="274320"/>
-            <a:ext cx="5486400" cy="365760"/>
+            <a:ext cx="11064240" cy="365760"/>
           </a:xfrm>
           <a:prstGeom prst="rect">
             <a:avLst/>
@@ -8576,28 +9492,28 @@
             <a:r>
               <a:rPr lang="en-US" sz="2400" b="1" dirty="0">
                 <a:solidFill>
-                  <a:srgbClr val="C4620A"/>
-                </a:solidFill>
-                <a:latin typeface="Arial" pitchFamily="34" charset="0"/>
-                <a:ea typeface="Arial" pitchFamily="34" charset="-122"/>
-                <a:cs typeface="Arial" pitchFamily="34" charset="-120"/>
-              </a:rPr>
-              <a:t>MVP · RESPONSÁVEL</a:t>
-            </a:r>
-            <a:endParaRPr lang="en-US" sz="2400" dirty="0"/>
-          </a:p>
-        </p:txBody>
-      </p:sp>
-      <p:sp>
-        <p:nvSpPr>
-          <p:cNvPr id="3" name="Text 1"/>
+                  <a:srgbClr val="6FD3D0"/>
+                </a:solidFill>
+                <a:latin typeface="Arial" pitchFamily="34" charset="0"/>
+                <a:ea typeface="Arial" pitchFamily="34" charset="-122"/>
+                <a:cs typeface="Arial" pitchFamily="34" charset="-120"/>
+              </a:rPr>
+              <a:t>MVP: RESPONSÁVEL</a:t>
+            </a:r>
+            <a:endParaRPr lang="en-US" sz="2400" dirty="0"/>
+          </a:p>
+        </p:txBody>
+      </p:sp>
+      <p:sp>
+        <p:nvSpPr>
+          <p:cNvPr id="4" name="Text 2"/>
           <p:cNvSpPr txBox="1"/>
           <p:nvPr/>
         </p:nvSpPr>
         <p:spPr>
           <a:xfrm>
             <a:off x="548640" y="713232"/>
-            <a:ext cx="5486400" cy="1463040"/>
+            <a:ext cx="11064240" cy="640080"/>
           </a:xfrm>
           <a:prstGeom prst="rect">
             <a:avLst/>
@@ -8615,7 +9531,7 @@
             <a:r>
               <a:rPr lang="en-US" sz="3200" b="1" dirty="0">
                 <a:solidFill>
-                  <a:srgbClr val="14202E"/>
+                  <a:srgbClr val="FFFFFF"/>
                 </a:solidFill>
                 <a:latin typeface="Arial" pitchFamily="34" charset="0"/>
                 <a:ea typeface="Arial" pitchFamily="34" charset="-122"/>
@@ -8629,7 +9545,7 @@
       </p:sp>
       <p:sp>
         <p:nvSpPr>
-          <p:cNvPr id="4" name="Text 2"/>
+          <p:cNvPr id="5" name="Text 3"/>
           <p:cNvSpPr txBox="1"/>
           <p:nvPr/>
         </p:nvSpPr>
@@ -8668,14 +9584,14 @@
       </p:sp>
       <p:sp>
         <p:nvSpPr>
-          <p:cNvPr id="6" name="Text 3"/>
-          <p:cNvSpPr txBox="1"/>
-          <p:nvPr/>
-        </p:nvSpPr>
-        <p:spPr>
-          <a:xfrm>
-            <a:off x="548640" y="2468880"/>
-            <a:ext cx="5486400" cy="3566160"/>
+          <p:cNvPr id="7" name="Text 4"/>
+          <p:cNvSpPr txBox="1"/>
+          <p:nvPr/>
+        </p:nvSpPr>
+        <p:spPr>
+          <a:xfrm>
+            <a:off x="548640" y="2377440"/>
+            <a:ext cx="5486400" cy="3657600"/>
           </a:xfrm>
           <a:prstGeom prst="rect">
             <a:avLst/>
@@ -8753,22 +9669,22 @@
       </p:sp>
       <p:pic>
         <p:nvPicPr>
-          <p:cNvPr id="7" name="Image 0" descr="/home/claude/u/ppt/media/image3.jpeg"/>
+          <p:cNvPr id="8" name="Image 0" descr="/home/claude/u/ppt/media/image3.jpeg"/>
           <p:cNvPicPr>
             <a:picLocks noChangeAspect="1"/>
           </p:cNvPicPr>
           <p:nvPr/>
         </p:nvPicPr>
         <p:blipFill>
-          <a:blip r:embed="rId3"/>
+          <a:blip r:embed="rId4"/>
           <a:stretch>
             <a:fillRect/>
           </a:stretch>
         </p:blipFill>
         <p:spPr>
           <a:xfrm>
-            <a:off x="6309360" y="1922240"/>
-            <a:ext cx="5349240" cy="4019360"/>
+            <a:off x="6035041" y="1444752"/>
+            <a:ext cx="6156654" cy="4590288"/>
           </a:xfrm>
           <a:prstGeom prst="rect">
             <a:avLst/>
@@ -8784,47 +9700,47 @@
 </file>
 
 <file path=ppt/theme/theme1.xml><?xml version="1.0" encoding="utf-8"?>
-<a:theme xmlns:a="http://schemas.openxmlformats.org/drawingml/2006/main" name="Office Theme">
+<a:theme xmlns:a="http://schemas.openxmlformats.org/drawingml/2006/main" name="Safe Student">
   <a:themeElements>
-    <a:clrScheme name="Office">
+    <a:clrScheme name="Safe Student">
       <a:dk1>
-        <a:sysClr val="windowText" lastClr="000000"/>
+        <a:srgbClr val="14202E"/>
       </a:dk1>
       <a:lt1>
-        <a:sysClr val="window" lastClr="FFFFFF"/>
+        <a:srgbClr val="FFFFFF"/>
       </a:lt1>
       <a:dk2>
-        <a:srgbClr val="44546A"/>
+        <a:srgbClr val="33414F"/>
       </a:dk2>
       <a:lt2>
-        <a:srgbClr val="E7E6E6"/>
+        <a:srgbClr val="F4F7FB"/>
       </a:lt2>
       <a:accent1>
-        <a:srgbClr val="4472C4"/>
+        <a:srgbClr val="1D5FD0"/>
       </a:accent1>
       <a:accent2>
-        <a:srgbClr val="ED7D31"/>
+        <a:srgbClr val="0B6E70"/>
       </a:accent2>
       <a:accent3>
-        <a:srgbClr val="A5A5A5"/>
+        <a:srgbClr val="8FB4F5"/>
       </a:accent3>
       <a:accent4>
-        <a:srgbClr val="FFC000"/>
+        <a:srgbClr val="5B6B7C"/>
       </a:accent4>
       <a:accent5>
-        <a:srgbClr val="5B9BD5"/>
+        <a:srgbClr val="6FD3D0"/>
       </a:accent5>
       <a:accent6>
-        <a:srgbClr val="70AD47"/>
+        <a:srgbClr val="DDE3EA"/>
       </a:accent6>
       <a:hlink>
-        <a:srgbClr val="0563C1"/>
+        <a:srgbClr val="1D5FD0"/>
       </a:hlink>
       <a:folHlink>
-        <a:srgbClr val="954F72"/>
+        <a:srgbClr val="5B6B7C"/>
       </a:folHlink>
     </a:clrScheme>
-    <a:fontScheme name="Office">
+    <a:fontScheme name="Safe Student">
       <a:majorFont>
         <a:latin typeface="Arial"/>
         <a:ea typeface=""/>
